--- a/docs/pptx/carbo/ritu-carbo-linsubhr-sens-grade3_10pct.pptx
+++ b/docs/pptx/carbo/ritu-carbo-linsubhr-sens-grade3_10pct.pptx
@@ -2443,7 +2443,7 @@
           </p:nvSpPr>
           <p:spPr>
             <a:xfrm>
-              <a:off x="1325501" y="2073503"/>
+              <a:off x="1325928" y="2073503"/>
               <a:ext cx="0" cy="3649639"/>
             </a:xfrm>
             <a:custGeom>
@@ -2486,7 +2486,7 @@
           </p:nvSpPr>
           <p:spPr>
             <a:xfrm>
-              <a:off x="2239092" y="2073503"/>
+              <a:off x="2237914" y="2073503"/>
               <a:ext cx="0" cy="3649639"/>
             </a:xfrm>
             <a:custGeom>
@@ -2529,7 +2529,7 @@
           </p:nvSpPr>
           <p:spPr>
             <a:xfrm>
-              <a:off x="3152683" y="2073503"/>
+              <a:off x="3149900" y="2073503"/>
               <a:ext cx="0" cy="3649639"/>
             </a:xfrm>
             <a:custGeom>
@@ -2572,7 +2572,7 @@
           </p:nvSpPr>
           <p:spPr>
             <a:xfrm>
-              <a:off x="4066274" y="2073503"/>
+              <a:off x="4061886" y="2073503"/>
               <a:ext cx="0" cy="3649639"/>
             </a:xfrm>
             <a:custGeom>
@@ -2615,7 +2615,7 @@
           </p:nvSpPr>
           <p:spPr>
             <a:xfrm>
-              <a:off x="4979865" y="2073503"/>
+              <a:off x="4973872" y="2073503"/>
               <a:ext cx="0" cy="3649639"/>
             </a:xfrm>
             <a:custGeom>
@@ -2658,7 +2658,7 @@
           </p:nvSpPr>
           <p:spPr>
             <a:xfrm>
-              <a:off x="5893456" y="2073503"/>
+              <a:off x="5885859" y="2073503"/>
               <a:ext cx="0" cy="3649639"/>
             </a:xfrm>
             <a:custGeom>
@@ -2701,7 +2701,7 @@
           </p:nvSpPr>
           <p:spPr>
             <a:xfrm>
-              <a:off x="6807046" y="2073503"/>
+              <a:off x="6797845" y="2073503"/>
               <a:ext cx="0" cy="3649639"/>
             </a:xfrm>
             <a:custGeom>
@@ -2744,7 +2744,7 @@
           </p:nvSpPr>
           <p:spPr>
             <a:xfrm>
-              <a:off x="7720637" y="2073503"/>
+              <a:off x="7709831" y="2073503"/>
               <a:ext cx="0" cy="3649639"/>
             </a:xfrm>
             <a:custGeom>
@@ -3002,7 +3002,7 @@
           </p:nvSpPr>
           <p:spPr>
             <a:xfrm>
-              <a:off x="868706" y="2073503"/>
+              <a:off x="869934" y="2073503"/>
               <a:ext cx="0" cy="3649639"/>
             </a:xfrm>
             <a:custGeom>
@@ -3045,7 +3045,7 @@
           </p:nvSpPr>
           <p:spPr>
             <a:xfrm>
-              <a:off x="1782297" y="2073503"/>
+              <a:off x="1781921" y="2073503"/>
               <a:ext cx="0" cy="3649639"/>
             </a:xfrm>
             <a:custGeom>
@@ -3088,7 +3088,7 @@
           </p:nvSpPr>
           <p:spPr>
             <a:xfrm>
-              <a:off x="2695888" y="2073503"/>
+              <a:off x="2693907" y="2073503"/>
               <a:ext cx="0" cy="3649639"/>
             </a:xfrm>
             <a:custGeom>
@@ -3131,7 +3131,7 @@
           </p:nvSpPr>
           <p:spPr>
             <a:xfrm>
-              <a:off x="3609478" y="2073503"/>
+              <a:off x="3605893" y="2073503"/>
               <a:ext cx="0" cy="3649639"/>
             </a:xfrm>
             <a:custGeom>
@@ -3174,7 +3174,7 @@
           </p:nvSpPr>
           <p:spPr>
             <a:xfrm>
-              <a:off x="4523069" y="2073503"/>
+              <a:off x="4517879" y="2073503"/>
               <a:ext cx="0" cy="3649639"/>
             </a:xfrm>
             <a:custGeom>
@@ -3217,7 +3217,7 @@
           </p:nvSpPr>
           <p:spPr>
             <a:xfrm>
-              <a:off x="5436660" y="2073503"/>
+              <a:off x="5429866" y="2073503"/>
               <a:ext cx="0" cy="3649639"/>
             </a:xfrm>
             <a:custGeom>
@@ -3260,7 +3260,7 @@
           </p:nvSpPr>
           <p:spPr>
             <a:xfrm>
-              <a:off x="6350251" y="2073503"/>
+              <a:off x="6341852" y="2073503"/>
               <a:ext cx="0" cy="3649639"/>
             </a:xfrm>
             <a:custGeom>
@@ -3303,7 +3303,7 @@
           </p:nvSpPr>
           <p:spPr>
             <a:xfrm>
-              <a:off x="7263842" y="2073503"/>
+              <a:off x="7253838" y="2073503"/>
               <a:ext cx="0" cy="3649639"/>
             </a:xfrm>
             <a:custGeom>
@@ -3346,7 +3346,7 @@
           </p:nvSpPr>
           <p:spPr>
             <a:xfrm>
-              <a:off x="8177433" y="2073503"/>
+              <a:off x="8165824" y="2073503"/>
               <a:ext cx="0" cy="3649639"/>
             </a:xfrm>
             <a:custGeom>
@@ -3390,536 +3390,536 @@
           <p:spPr>
             <a:xfrm>
               <a:off x="1172049" y="2073503"/>
-              <a:ext cx="7090630" cy="3448333"/>
+              <a:ext cx="7090630" cy="3447370"/>
             </a:xfrm>
             <a:custGeom>
               <a:avLst/>
               <a:pathLst>
-                <a:path w="7090630" h="3448333">
+                <a:path w="7090630" h="3447370">
                   <a:moveTo>
-                    <a:pt x="1809383" y="0"/>
+                    <a:pt x="1818260" y="0"/>
                   </a:moveTo>
                   <a:lnTo>
-                    <a:pt x="1862185" y="157441"/>
-                  </a:lnTo>
-                  <a:lnTo>
-                    <a:pt x="1933808" y="358116"/>
-                  </a:lnTo>
-                  <a:lnTo>
-                    <a:pt x="2005430" y="546684"/>
-                  </a:lnTo>
-                  <a:lnTo>
-                    <a:pt x="2077053" y="723877"/>
-                  </a:lnTo>
-                  <a:lnTo>
-                    <a:pt x="2148675" y="890379"/>
-                  </a:lnTo>
-                  <a:lnTo>
-                    <a:pt x="2220298" y="1046836"/>
-                  </a:lnTo>
-                  <a:lnTo>
-                    <a:pt x="2291920" y="1193855"/>
-                  </a:lnTo>
-                  <a:lnTo>
-                    <a:pt x="2363543" y="1332003"/>
-                  </a:lnTo>
-                  <a:lnTo>
-                    <a:pt x="2435165" y="1461818"/>
-                  </a:lnTo>
-                  <a:lnTo>
-                    <a:pt x="2506788" y="1583800"/>
-                  </a:lnTo>
-                  <a:lnTo>
-                    <a:pt x="2578410" y="1698423"/>
-                  </a:lnTo>
-                  <a:lnTo>
-                    <a:pt x="2650033" y="1806132"/>
-                  </a:lnTo>
-                  <a:lnTo>
-                    <a:pt x="2721655" y="1907342"/>
-                  </a:lnTo>
-                  <a:lnTo>
-                    <a:pt x="2793278" y="2002446"/>
-                  </a:lnTo>
-                  <a:lnTo>
-                    <a:pt x="2864901" y="2091812"/>
-                  </a:lnTo>
-                  <a:lnTo>
-                    <a:pt x="2936523" y="2175788"/>
-                  </a:lnTo>
-                  <a:lnTo>
-                    <a:pt x="3008146" y="2254696"/>
-                  </a:lnTo>
-                  <a:lnTo>
-                    <a:pt x="3079768" y="2328845"/>
-                  </a:lnTo>
-                  <a:lnTo>
-                    <a:pt x="3151391" y="2398520"/>
-                  </a:lnTo>
-                  <a:lnTo>
-                    <a:pt x="3223013" y="2463991"/>
-                  </a:lnTo>
-                  <a:lnTo>
-                    <a:pt x="3294636" y="2525513"/>
-                  </a:lnTo>
-                  <a:lnTo>
-                    <a:pt x="3366258" y="2583323"/>
-                  </a:lnTo>
-                  <a:lnTo>
-                    <a:pt x="3437881" y="2637645"/>
-                  </a:lnTo>
-                  <a:lnTo>
-                    <a:pt x="3509503" y="2659397"/>
-                  </a:lnTo>
-                  <a:lnTo>
-                    <a:pt x="3581126" y="2666851"/>
-                  </a:lnTo>
-                  <a:lnTo>
-                    <a:pt x="3652748" y="2674239"/>
-                  </a:lnTo>
-                  <a:lnTo>
-                    <a:pt x="3724371" y="2681559"/>
-                  </a:lnTo>
-                  <a:lnTo>
-                    <a:pt x="3795993" y="2688813"/>
-                  </a:lnTo>
-                  <a:lnTo>
-                    <a:pt x="3867616" y="2696001"/>
-                  </a:lnTo>
-                  <a:lnTo>
-                    <a:pt x="3939238" y="2703125"/>
-                  </a:lnTo>
-                  <a:lnTo>
-                    <a:pt x="4010861" y="2710184"/>
-                  </a:lnTo>
-                  <a:lnTo>
-                    <a:pt x="4082483" y="2717179"/>
-                  </a:lnTo>
-                  <a:lnTo>
-                    <a:pt x="4154106" y="2724111"/>
-                  </a:lnTo>
-                  <a:lnTo>
-                    <a:pt x="4225729" y="2730980"/>
-                  </a:lnTo>
-                  <a:lnTo>
-                    <a:pt x="4297351" y="2737787"/>
-                  </a:lnTo>
-                  <a:lnTo>
-                    <a:pt x="4368974" y="2744533"/>
-                  </a:lnTo>
-                  <a:lnTo>
-                    <a:pt x="4440596" y="2751217"/>
-                  </a:lnTo>
-                  <a:lnTo>
-                    <a:pt x="4512219" y="2757841"/>
-                  </a:lnTo>
-                  <a:lnTo>
-                    <a:pt x="4583841" y="2764406"/>
-                  </a:lnTo>
-                  <a:lnTo>
-                    <a:pt x="4655464" y="2770910"/>
-                  </a:lnTo>
-                  <a:lnTo>
-                    <a:pt x="4727086" y="2777356"/>
-                  </a:lnTo>
-                  <a:lnTo>
-                    <a:pt x="4798709" y="2783744"/>
-                  </a:lnTo>
-                  <a:lnTo>
-                    <a:pt x="4870331" y="2790074"/>
-                  </a:lnTo>
-                  <a:lnTo>
-                    <a:pt x="4941954" y="2796347"/>
-                  </a:lnTo>
-                  <a:lnTo>
-                    <a:pt x="5013576" y="2802563"/>
-                  </a:lnTo>
-                  <a:lnTo>
-                    <a:pt x="5085199" y="2808723"/>
-                  </a:lnTo>
-                  <a:lnTo>
-                    <a:pt x="5156821" y="2814827"/>
-                  </a:lnTo>
-                  <a:lnTo>
-                    <a:pt x="5228444" y="2820876"/>
-                  </a:lnTo>
-                  <a:lnTo>
-                    <a:pt x="5300066" y="2826870"/>
-                  </a:lnTo>
-                  <a:lnTo>
-                    <a:pt x="5371689" y="2832810"/>
-                  </a:lnTo>
-                  <a:lnTo>
-                    <a:pt x="5443311" y="2838696"/>
-                  </a:lnTo>
-                  <a:lnTo>
-                    <a:pt x="5514934" y="2844529"/>
-                  </a:lnTo>
-                  <a:lnTo>
-                    <a:pt x="5586557" y="2850310"/>
-                  </a:lnTo>
-                  <a:lnTo>
-                    <a:pt x="5658179" y="2856038"/>
-                  </a:lnTo>
-                  <a:lnTo>
-                    <a:pt x="5729802" y="2861714"/>
-                  </a:lnTo>
-                  <a:lnTo>
-                    <a:pt x="5801424" y="2867339"/>
-                  </a:lnTo>
-                  <a:lnTo>
-                    <a:pt x="5873047" y="2872913"/>
-                  </a:lnTo>
-                  <a:lnTo>
-                    <a:pt x="5944669" y="2878437"/>
-                  </a:lnTo>
-                  <a:lnTo>
-                    <a:pt x="6016292" y="2883910"/>
-                  </a:lnTo>
-                  <a:lnTo>
-                    <a:pt x="6087914" y="2889335"/>
-                  </a:lnTo>
-                  <a:lnTo>
-                    <a:pt x="6159537" y="2894710"/>
-                  </a:lnTo>
-                  <a:lnTo>
-                    <a:pt x="6231159" y="2900036"/>
-                  </a:lnTo>
-                  <a:lnTo>
-                    <a:pt x="6302782" y="2905315"/>
-                  </a:lnTo>
-                  <a:lnTo>
-                    <a:pt x="6374404" y="2910545"/>
-                  </a:lnTo>
-                  <a:lnTo>
-                    <a:pt x="6446027" y="2915729"/>
-                  </a:lnTo>
-                  <a:lnTo>
-                    <a:pt x="6517649" y="2920865"/>
-                  </a:lnTo>
-                  <a:lnTo>
-                    <a:pt x="6589272" y="2925955"/>
-                  </a:lnTo>
-                  <a:lnTo>
-                    <a:pt x="6660894" y="2930999"/>
-                  </a:lnTo>
-                  <a:lnTo>
-                    <a:pt x="6732517" y="2935997"/>
-                  </a:lnTo>
-                  <a:lnTo>
-                    <a:pt x="6804139" y="2940951"/>
-                  </a:lnTo>
-                  <a:lnTo>
-                    <a:pt x="6875762" y="2945859"/>
-                  </a:lnTo>
-                  <a:lnTo>
-                    <a:pt x="6947385" y="2950723"/>
-                  </a:lnTo>
-                  <a:lnTo>
-                    <a:pt x="7019007" y="2955543"/>
-                  </a:lnTo>
-                  <a:lnTo>
-                    <a:pt x="7090630" y="2960320"/>
-                  </a:lnTo>
-                  <a:lnTo>
-                    <a:pt x="7090630" y="3448333"/>
-                  </a:lnTo>
-                  <a:lnTo>
-                    <a:pt x="7019007" y="3446059"/>
-                  </a:lnTo>
-                  <a:lnTo>
-                    <a:pt x="6947385" y="3443639"/>
-                  </a:lnTo>
-                  <a:lnTo>
-                    <a:pt x="6875762" y="3441064"/>
-                  </a:lnTo>
-                  <a:lnTo>
-                    <a:pt x="6804139" y="3438324"/>
-                  </a:lnTo>
-                  <a:lnTo>
-                    <a:pt x="6732517" y="3435408"/>
-                  </a:lnTo>
-                  <a:lnTo>
-                    <a:pt x="6660894" y="3432304"/>
-                  </a:lnTo>
-                  <a:lnTo>
-                    <a:pt x="6589272" y="3429002"/>
-                  </a:lnTo>
-                  <a:lnTo>
-                    <a:pt x="6517649" y="3425487"/>
-                  </a:lnTo>
-                  <a:lnTo>
-                    <a:pt x="6446027" y="3421746"/>
-                  </a:lnTo>
-                  <a:lnTo>
-                    <a:pt x="6374404" y="3417766"/>
-                  </a:lnTo>
-                  <a:lnTo>
-                    <a:pt x="6302782" y="3413530"/>
-                  </a:lnTo>
-                  <a:lnTo>
-                    <a:pt x="6231159" y="3409022"/>
-                  </a:lnTo>
-                  <a:lnTo>
-                    <a:pt x="6159537" y="3404224"/>
-                  </a:lnTo>
-                  <a:lnTo>
-                    <a:pt x="6087914" y="3399118"/>
-                  </a:lnTo>
-                  <a:lnTo>
-                    <a:pt x="6016292" y="3393685"/>
-                  </a:lnTo>
-                  <a:lnTo>
-                    <a:pt x="5944669" y="3387903"/>
-                  </a:lnTo>
-                  <a:lnTo>
-                    <a:pt x="5873047" y="3381749"/>
-                  </a:lnTo>
-                  <a:lnTo>
-                    <a:pt x="5801424" y="3375201"/>
-                  </a:lnTo>
-                  <a:lnTo>
-                    <a:pt x="5729802" y="3368232"/>
-                  </a:lnTo>
-                  <a:lnTo>
-                    <a:pt x="5658179" y="3360815"/>
-                  </a:lnTo>
-                  <a:lnTo>
-                    <a:pt x="5586557" y="3352923"/>
-                  </a:lnTo>
-                  <a:lnTo>
-                    <a:pt x="5514934" y="3344524"/>
-                  </a:lnTo>
-                  <a:lnTo>
-                    <a:pt x="5443311" y="3335585"/>
-                  </a:lnTo>
-                  <a:lnTo>
-                    <a:pt x="5371689" y="3326073"/>
-                  </a:lnTo>
-                  <a:lnTo>
-                    <a:pt x="5300066" y="3315949"/>
-                  </a:lnTo>
-                  <a:lnTo>
-                    <a:pt x="5228444" y="3305176"/>
-                  </a:lnTo>
-                  <a:lnTo>
-                    <a:pt x="5156821" y="3293712"/>
-                  </a:lnTo>
-                  <a:lnTo>
-                    <a:pt x="5085199" y="3281511"/>
-                  </a:lnTo>
-                  <a:lnTo>
-                    <a:pt x="5013576" y="3268527"/>
-                  </a:lnTo>
-                  <a:lnTo>
-                    <a:pt x="4941954" y="3254709"/>
-                  </a:lnTo>
-                  <a:lnTo>
-                    <a:pt x="4870331" y="3240004"/>
-                  </a:lnTo>
-                  <a:lnTo>
-                    <a:pt x="4798709" y="3224355"/>
-                  </a:lnTo>
-                  <a:lnTo>
-                    <a:pt x="4727086" y="3207701"/>
-                  </a:lnTo>
-                  <a:lnTo>
-                    <a:pt x="4655464" y="3189978"/>
-                  </a:lnTo>
-                  <a:lnTo>
-                    <a:pt x="4583841" y="3171117"/>
-                  </a:lnTo>
-                  <a:lnTo>
-                    <a:pt x="4512219" y="3151045"/>
-                  </a:lnTo>
-                  <a:lnTo>
-                    <a:pt x="4440596" y="3129685"/>
-                  </a:lnTo>
-                  <a:lnTo>
-                    <a:pt x="4368974" y="3106953"/>
-                  </a:lnTo>
-                  <a:lnTo>
-                    <a:pt x="4297351" y="3082762"/>
-                  </a:lnTo>
-                  <a:lnTo>
-                    <a:pt x="4225729" y="3057017"/>
-                  </a:lnTo>
-                  <a:lnTo>
-                    <a:pt x="4154106" y="3029620"/>
-                  </a:lnTo>
-                  <a:lnTo>
-                    <a:pt x="4082483" y="3000463"/>
-                  </a:lnTo>
-                  <a:lnTo>
-                    <a:pt x="4010861" y="2969435"/>
-                  </a:lnTo>
-                  <a:lnTo>
-                    <a:pt x="3939238" y="2936415"/>
-                  </a:lnTo>
-                  <a:lnTo>
-                    <a:pt x="3867616" y="2901274"/>
-                  </a:lnTo>
-                  <a:lnTo>
-                    <a:pt x="3795993" y="2863878"/>
-                  </a:lnTo>
-                  <a:lnTo>
-                    <a:pt x="3724371" y="2824080"/>
-                  </a:lnTo>
-                  <a:lnTo>
-                    <a:pt x="3652748" y="2781728"/>
-                  </a:lnTo>
-                  <a:lnTo>
-                    <a:pt x="3581126" y="2736656"/>
-                  </a:lnTo>
-                  <a:lnTo>
-                    <a:pt x="3509503" y="2688690"/>
-                  </a:lnTo>
-                  <a:lnTo>
-                    <a:pt x="3437881" y="2651875"/>
-                  </a:lnTo>
-                  <a:lnTo>
-                    <a:pt x="3366258" y="2644284"/>
-                  </a:lnTo>
-                  <a:lnTo>
-                    <a:pt x="3294636" y="2636623"/>
-                  </a:lnTo>
-                  <a:lnTo>
-                    <a:pt x="3223013" y="2628893"/>
-                  </a:lnTo>
-                  <a:lnTo>
-                    <a:pt x="3151391" y="2621092"/>
-                  </a:lnTo>
-                  <a:lnTo>
-                    <a:pt x="3079768" y="2613220"/>
-                  </a:lnTo>
-                  <a:lnTo>
-                    <a:pt x="3008146" y="2605276"/>
-                  </a:lnTo>
-                  <a:lnTo>
-                    <a:pt x="2936523" y="2597260"/>
-                  </a:lnTo>
-                  <a:lnTo>
-                    <a:pt x="2864901" y="2589170"/>
-                  </a:lnTo>
-                  <a:lnTo>
-                    <a:pt x="2793278" y="2581007"/>
-                  </a:lnTo>
-                  <a:lnTo>
-                    <a:pt x="2721655" y="2572769"/>
-                  </a:lnTo>
-                  <a:lnTo>
-                    <a:pt x="2650033" y="2564456"/>
-                  </a:lnTo>
-                  <a:lnTo>
-                    <a:pt x="2578410" y="2556068"/>
-                  </a:lnTo>
-                  <a:lnTo>
-                    <a:pt x="2506788" y="2547602"/>
-                  </a:lnTo>
-                  <a:lnTo>
-                    <a:pt x="2435165" y="2539060"/>
-                  </a:lnTo>
-                  <a:lnTo>
-                    <a:pt x="2363543" y="2530439"/>
-                  </a:lnTo>
-                  <a:lnTo>
-                    <a:pt x="2291920" y="2521740"/>
-                  </a:lnTo>
-                  <a:lnTo>
-                    <a:pt x="2220298" y="2512961"/>
-                  </a:lnTo>
-                  <a:lnTo>
-                    <a:pt x="2148675" y="2504102"/>
-                  </a:lnTo>
-                  <a:lnTo>
-                    <a:pt x="2077053" y="2495163"/>
-                  </a:lnTo>
-                  <a:lnTo>
-                    <a:pt x="2005430" y="2486142"/>
-                  </a:lnTo>
-                  <a:lnTo>
-                    <a:pt x="1933808" y="2477038"/>
-                  </a:lnTo>
-                  <a:lnTo>
-                    <a:pt x="1862185" y="2467852"/>
-                  </a:lnTo>
-                  <a:lnTo>
-                    <a:pt x="1790563" y="2458581"/>
-                  </a:lnTo>
-                  <a:lnTo>
-                    <a:pt x="1718940" y="2449226"/>
-                  </a:lnTo>
-                  <a:lnTo>
-                    <a:pt x="1647318" y="2439786"/>
-                  </a:lnTo>
-                  <a:lnTo>
-                    <a:pt x="1575695" y="2430259"/>
-                  </a:lnTo>
-                  <a:lnTo>
-                    <a:pt x="1504073" y="2420646"/>
-                  </a:lnTo>
-                  <a:lnTo>
-                    <a:pt x="1432450" y="2410945"/>
-                  </a:lnTo>
-                  <a:lnTo>
-                    <a:pt x="1360827" y="2401155"/>
-                  </a:lnTo>
-                  <a:lnTo>
-                    <a:pt x="1289205" y="2391276"/>
-                  </a:lnTo>
-                  <a:lnTo>
-                    <a:pt x="1217582" y="2381307"/>
-                  </a:lnTo>
-                  <a:lnTo>
-                    <a:pt x="1145960" y="2371247"/>
-                  </a:lnTo>
-                  <a:lnTo>
-                    <a:pt x="1074337" y="2361095"/>
-                  </a:lnTo>
-                  <a:lnTo>
-                    <a:pt x="1002715" y="2350850"/>
-                  </a:lnTo>
-                  <a:lnTo>
-                    <a:pt x="931092" y="2340512"/>
-                  </a:lnTo>
-                  <a:lnTo>
-                    <a:pt x="859470" y="2330080"/>
-                  </a:lnTo>
-                  <a:lnTo>
-                    <a:pt x="787847" y="2319552"/>
-                  </a:lnTo>
-                  <a:lnTo>
-                    <a:pt x="716225" y="2308929"/>
-                  </a:lnTo>
-                  <a:lnTo>
-                    <a:pt x="644602" y="2298208"/>
-                  </a:lnTo>
-                  <a:lnTo>
-                    <a:pt x="572980" y="2287390"/>
-                  </a:lnTo>
-                  <a:lnTo>
-                    <a:pt x="501357" y="2276473"/>
-                  </a:lnTo>
-                  <a:lnTo>
-                    <a:pt x="429735" y="2265456"/>
-                  </a:lnTo>
-                  <a:lnTo>
-                    <a:pt x="358112" y="2254339"/>
-                  </a:lnTo>
-                  <a:lnTo>
-                    <a:pt x="286490" y="2243120"/>
-                  </a:lnTo>
-                  <a:lnTo>
-                    <a:pt x="214867" y="2231799"/>
-                  </a:lnTo>
-                  <a:lnTo>
-                    <a:pt x="143245" y="2220374"/>
-                  </a:lnTo>
-                  <a:lnTo>
-                    <a:pt x="71622" y="2208846"/>
-                  </a:lnTo>
-                  <a:lnTo>
-                    <a:pt x="0" y="2197212"/>
+                    <a:pt x="1862185" y="131427"/>
+                  </a:lnTo>
+                  <a:lnTo>
+                    <a:pt x="1933808" y="332850"/>
+                  </a:lnTo>
+                  <a:lnTo>
+                    <a:pt x="2005430" y="522171"/>
+                  </a:lnTo>
+                  <a:lnTo>
+                    <a:pt x="2077053" y="700116"/>
+                  </a:lnTo>
+                  <a:lnTo>
+                    <a:pt x="2148675" y="867370"/>
+                  </a:lnTo>
+                  <a:lnTo>
+                    <a:pt x="2220298" y="1024574"/>
+                  </a:lnTo>
+                  <a:lnTo>
+                    <a:pt x="2291920" y="1172333"/>
+                  </a:lnTo>
+                  <a:lnTo>
+                    <a:pt x="2363543" y="1311213"/>
+                  </a:lnTo>
+                  <a:lnTo>
+                    <a:pt x="2435165" y="1441749"/>
+                  </a:lnTo>
+                  <a:lnTo>
+                    <a:pt x="2506788" y="1564442"/>
+                  </a:lnTo>
+                  <a:lnTo>
+                    <a:pt x="2578410" y="1679763"/>
+                  </a:lnTo>
+                  <a:lnTo>
+                    <a:pt x="2650033" y="1788155"/>
+                  </a:lnTo>
+                  <a:lnTo>
+                    <a:pt x="2721655" y="1890034"/>
+                  </a:lnTo>
+                  <a:lnTo>
+                    <a:pt x="2793278" y="1985792"/>
+                  </a:lnTo>
+                  <a:lnTo>
+                    <a:pt x="2864901" y="2075796"/>
+                  </a:lnTo>
+                  <a:lnTo>
+                    <a:pt x="2936523" y="2160392"/>
+                  </a:lnTo>
+                  <a:lnTo>
+                    <a:pt x="3008146" y="2239906"/>
+                  </a:lnTo>
+                  <a:lnTo>
+                    <a:pt x="3079768" y="2314641"/>
+                  </a:lnTo>
+                  <a:lnTo>
+                    <a:pt x="3151391" y="2384887"/>
+                  </a:lnTo>
+                  <a:lnTo>
+                    <a:pt x="3223013" y="2450911"/>
+                  </a:lnTo>
+                  <a:lnTo>
+                    <a:pt x="3294636" y="2512969"/>
+                  </a:lnTo>
+                  <a:lnTo>
+                    <a:pt x="3366258" y="2571298"/>
+                  </a:lnTo>
+                  <a:lnTo>
+                    <a:pt x="3437881" y="2626122"/>
+                  </a:lnTo>
+                  <a:lnTo>
+                    <a:pt x="3509503" y="2657547"/>
+                  </a:lnTo>
+                  <a:lnTo>
+                    <a:pt x="3581126" y="2664582"/>
+                  </a:lnTo>
+                  <a:lnTo>
+                    <a:pt x="3652748" y="2671556"/>
+                  </a:lnTo>
+                  <a:lnTo>
+                    <a:pt x="3724371" y="2678471"/>
+                  </a:lnTo>
+                  <a:lnTo>
+                    <a:pt x="3795993" y="2685327"/>
+                  </a:lnTo>
+                  <a:lnTo>
+                    <a:pt x="3867616" y="2692125"/>
+                  </a:lnTo>
+                  <a:lnTo>
+                    <a:pt x="3939238" y="2698865"/>
+                  </a:lnTo>
+                  <a:lnTo>
+                    <a:pt x="4010861" y="2705548"/>
+                  </a:lnTo>
+                  <a:lnTo>
+                    <a:pt x="4082483" y="2712173"/>
+                  </a:lnTo>
+                  <a:lnTo>
+                    <a:pt x="4154106" y="2718743"/>
+                  </a:lnTo>
+                  <a:lnTo>
+                    <a:pt x="4225729" y="2725256"/>
+                  </a:lnTo>
+                  <a:lnTo>
+                    <a:pt x="4297351" y="2731714"/>
+                  </a:lnTo>
+                  <a:lnTo>
+                    <a:pt x="4368974" y="2738117"/>
+                  </a:lnTo>
+                  <a:lnTo>
+                    <a:pt x="4440596" y="2744465"/>
+                  </a:lnTo>
+                  <a:lnTo>
+                    <a:pt x="4512219" y="2750759"/>
+                  </a:lnTo>
+                  <a:lnTo>
+                    <a:pt x="4583841" y="2757000"/>
+                  </a:lnTo>
+                  <a:lnTo>
+                    <a:pt x="4655464" y="2763188"/>
+                  </a:lnTo>
+                  <a:lnTo>
+                    <a:pt x="4727086" y="2769323"/>
+                  </a:lnTo>
+                  <a:lnTo>
+                    <a:pt x="4798709" y="2775405"/>
+                  </a:lnTo>
+                  <a:lnTo>
+                    <a:pt x="4870331" y="2781436"/>
+                  </a:lnTo>
+                  <a:lnTo>
+                    <a:pt x="4941954" y="2787416"/>
+                  </a:lnTo>
+                  <a:lnTo>
+                    <a:pt x="5013576" y="2793344"/>
+                  </a:lnTo>
+                  <a:lnTo>
+                    <a:pt x="5085199" y="2799222"/>
+                  </a:lnTo>
+                  <a:lnTo>
+                    <a:pt x="5156821" y="2805051"/>
+                  </a:lnTo>
+                  <a:lnTo>
+                    <a:pt x="5228444" y="2810829"/>
+                  </a:lnTo>
+                  <a:lnTo>
+                    <a:pt x="5300066" y="2816558"/>
+                  </a:lnTo>
+                  <a:lnTo>
+                    <a:pt x="5371689" y="2822239"/>
+                  </a:lnTo>
+                  <a:lnTo>
+                    <a:pt x="5443311" y="2827871"/>
+                  </a:lnTo>
+                  <a:lnTo>
+                    <a:pt x="5514934" y="2833455"/>
+                  </a:lnTo>
+                  <a:lnTo>
+                    <a:pt x="5586557" y="2838992"/>
+                  </a:lnTo>
+                  <a:lnTo>
+                    <a:pt x="5658179" y="2844481"/>
+                  </a:lnTo>
+                  <a:lnTo>
+                    <a:pt x="5729802" y="2849924"/>
+                  </a:lnTo>
+                  <a:lnTo>
+                    <a:pt x="5801424" y="2855320"/>
+                  </a:lnTo>
+                  <a:lnTo>
+                    <a:pt x="5873047" y="2860671"/>
+                  </a:lnTo>
+                  <a:lnTo>
+                    <a:pt x="5944669" y="2865976"/>
+                  </a:lnTo>
+                  <a:lnTo>
+                    <a:pt x="6016292" y="2871236"/>
+                  </a:lnTo>
+                  <a:lnTo>
+                    <a:pt x="6087914" y="2876451"/>
+                  </a:lnTo>
+                  <a:lnTo>
+                    <a:pt x="6159537" y="2881621"/>
+                  </a:lnTo>
+                  <a:lnTo>
+                    <a:pt x="6231159" y="2886748"/>
+                  </a:lnTo>
+                  <a:lnTo>
+                    <a:pt x="6302782" y="2891831"/>
+                  </a:lnTo>
+                  <a:lnTo>
+                    <a:pt x="6374404" y="2896870"/>
+                  </a:lnTo>
+                  <a:lnTo>
+                    <a:pt x="6446027" y="2901867"/>
+                  </a:lnTo>
+                  <a:lnTo>
+                    <a:pt x="6517649" y="2906821"/>
+                  </a:lnTo>
+                  <a:lnTo>
+                    <a:pt x="6589272" y="2911733"/>
+                  </a:lnTo>
+                  <a:lnTo>
+                    <a:pt x="6660894" y="2916603"/>
+                  </a:lnTo>
+                  <a:lnTo>
+                    <a:pt x="6732517" y="2921432"/>
+                  </a:lnTo>
+                  <a:lnTo>
+                    <a:pt x="6804139" y="2926220"/>
+                  </a:lnTo>
+                  <a:lnTo>
+                    <a:pt x="6875762" y="2930966"/>
+                  </a:lnTo>
+                  <a:lnTo>
+                    <a:pt x="6947385" y="2935673"/>
+                  </a:lnTo>
+                  <a:lnTo>
+                    <a:pt x="7019007" y="2940339"/>
+                  </a:lnTo>
+                  <a:lnTo>
+                    <a:pt x="7090630" y="2944966"/>
+                  </a:lnTo>
+                  <a:lnTo>
+                    <a:pt x="7090630" y="3447370"/>
+                  </a:lnTo>
+                  <a:lnTo>
+                    <a:pt x="7019007" y="3445044"/>
+                  </a:lnTo>
+                  <a:lnTo>
+                    <a:pt x="6947385" y="3442570"/>
+                  </a:lnTo>
+                  <a:lnTo>
+                    <a:pt x="6875762" y="3439938"/>
+                  </a:lnTo>
+                  <a:lnTo>
+                    <a:pt x="6804139" y="3437138"/>
+                  </a:lnTo>
+                  <a:lnTo>
+                    <a:pt x="6732517" y="3434158"/>
+                  </a:lnTo>
+                  <a:lnTo>
+                    <a:pt x="6660894" y="3430988"/>
+                  </a:lnTo>
+                  <a:lnTo>
+                    <a:pt x="6589272" y="3427616"/>
+                  </a:lnTo>
+                  <a:lnTo>
+                    <a:pt x="6517649" y="3424028"/>
+                  </a:lnTo>
+                  <a:lnTo>
+                    <a:pt x="6446027" y="3420210"/>
+                  </a:lnTo>
+                  <a:lnTo>
+                    <a:pt x="6374404" y="3416148"/>
+                  </a:lnTo>
+                  <a:lnTo>
+                    <a:pt x="6302782" y="3411827"/>
+                  </a:lnTo>
+                  <a:lnTo>
+                    <a:pt x="6231159" y="3407230"/>
+                  </a:lnTo>
+                  <a:lnTo>
+                    <a:pt x="6159537" y="3402338"/>
+                  </a:lnTo>
+                  <a:lnTo>
+                    <a:pt x="6087914" y="3397134"/>
+                  </a:lnTo>
+                  <a:lnTo>
+                    <a:pt x="6016292" y="3391597"/>
+                  </a:lnTo>
+                  <a:lnTo>
+                    <a:pt x="5944669" y="3385707"/>
+                  </a:lnTo>
+                  <a:lnTo>
+                    <a:pt x="5873047" y="3379439"/>
+                  </a:lnTo>
+                  <a:lnTo>
+                    <a:pt x="5801424" y="3372772"/>
+                  </a:lnTo>
+                  <a:lnTo>
+                    <a:pt x="5729802" y="3365677"/>
+                  </a:lnTo>
+                  <a:lnTo>
+                    <a:pt x="5658179" y="3358130"/>
+                  </a:lnTo>
+                  <a:lnTo>
+                    <a:pt x="5586557" y="3350100"/>
+                  </a:lnTo>
+                  <a:lnTo>
+                    <a:pt x="5514934" y="3341556"/>
+                  </a:lnTo>
+                  <a:lnTo>
+                    <a:pt x="5443311" y="3332467"/>
+                  </a:lnTo>
+                  <a:lnTo>
+                    <a:pt x="5371689" y="3322796"/>
+                  </a:lnTo>
+                  <a:lnTo>
+                    <a:pt x="5300066" y="3312507"/>
+                  </a:lnTo>
+                  <a:lnTo>
+                    <a:pt x="5228444" y="3301560"/>
+                  </a:lnTo>
+                  <a:lnTo>
+                    <a:pt x="5156821" y="3289914"/>
+                  </a:lnTo>
+                  <a:lnTo>
+                    <a:pt x="5085199" y="3277523"/>
+                  </a:lnTo>
+                  <a:lnTo>
+                    <a:pt x="5013576" y="3264340"/>
+                  </a:lnTo>
+                  <a:lnTo>
+                    <a:pt x="4941954" y="3250315"/>
+                  </a:lnTo>
+                  <a:lnTo>
+                    <a:pt x="4870331" y="3235392"/>
+                  </a:lnTo>
+                  <a:lnTo>
+                    <a:pt x="4798709" y="3219516"/>
+                  </a:lnTo>
+                  <a:lnTo>
+                    <a:pt x="4727086" y="3202625"/>
+                  </a:lnTo>
+                  <a:lnTo>
+                    <a:pt x="4655464" y="3184654"/>
+                  </a:lnTo>
+                  <a:lnTo>
+                    <a:pt x="4583841" y="3165534"/>
+                  </a:lnTo>
+                  <a:lnTo>
+                    <a:pt x="4512219" y="3145193"/>
+                  </a:lnTo>
+                  <a:lnTo>
+                    <a:pt x="4440596" y="3123550"/>
+                  </a:lnTo>
+                  <a:lnTo>
+                    <a:pt x="4368974" y="3100524"/>
+                  </a:lnTo>
+                  <a:lnTo>
+                    <a:pt x="4297351" y="3076027"/>
+                  </a:lnTo>
+                  <a:lnTo>
+                    <a:pt x="4225729" y="3049963"/>
+                  </a:lnTo>
+                  <a:lnTo>
+                    <a:pt x="4154106" y="3022233"/>
+                  </a:lnTo>
+                  <a:lnTo>
+                    <a:pt x="4082483" y="2992731"/>
+                  </a:lnTo>
+                  <a:lnTo>
+                    <a:pt x="4010861" y="2961342"/>
+                  </a:lnTo>
+                  <a:lnTo>
+                    <a:pt x="3939238" y="2927947"/>
+                  </a:lnTo>
+                  <a:lnTo>
+                    <a:pt x="3867616" y="2892417"/>
+                  </a:lnTo>
+                  <a:lnTo>
+                    <a:pt x="3795993" y="2854616"/>
+                  </a:lnTo>
+                  <a:lnTo>
+                    <a:pt x="3724371" y="2814398"/>
+                  </a:lnTo>
+                  <a:lnTo>
+                    <a:pt x="3652748" y="2771610"/>
+                  </a:lnTo>
+                  <a:lnTo>
+                    <a:pt x="3581126" y="2726086"/>
+                  </a:lnTo>
+                  <a:lnTo>
+                    <a:pt x="3509503" y="2677652"/>
+                  </a:lnTo>
+                  <a:lnTo>
+                    <a:pt x="3437881" y="2650453"/>
+                  </a:lnTo>
+                  <a:lnTo>
+                    <a:pt x="3366258" y="2643297"/>
+                  </a:lnTo>
+                  <a:lnTo>
+                    <a:pt x="3294636" y="2636080"/>
+                  </a:lnTo>
+                  <a:lnTo>
+                    <a:pt x="3223013" y="2628801"/>
+                  </a:lnTo>
+                  <a:lnTo>
+                    <a:pt x="3151391" y="2621459"/>
+                  </a:lnTo>
+                  <a:lnTo>
+                    <a:pt x="3079768" y="2614055"/>
+                  </a:lnTo>
+                  <a:lnTo>
+                    <a:pt x="3008146" y="2606586"/>
+                  </a:lnTo>
+                  <a:lnTo>
+                    <a:pt x="2936523" y="2599054"/>
+                  </a:lnTo>
+                  <a:lnTo>
+                    <a:pt x="2864901" y="2591457"/>
+                  </a:lnTo>
+                  <a:lnTo>
+                    <a:pt x="2793278" y="2583795"/>
+                  </a:lnTo>
+                  <a:lnTo>
+                    <a:pt x="2721655" y="2576067"/>
+                  </a:lnTo>
+                  <a:lnTo>
+                    <a:pt x="2650033" y="2568272"/>
+                  </a:lnTo>
+                  <a:lnTo>
+                    <a:pt x="2578410" y="2560411"/>
+                  </a:lnTo>
+                  <a:lnTo>
+                    <a:pt x="2506788" y="2552482"/>
+                  </a:lnTo>
+                  <a:lnTo>
+                    <a:pt x="2435165" y="2544485"/>
+                  </a:lnTo>
+                  <a:lnTo>
+                    <a:pt x="2363543" y="2536419"/>
+                  </a:lnTo>
+                  <a:lnTo>
+                    <a:pt x="2291920" y="2528285"/>
+                  </a:lnTo>
+                  <a:lnTo>
+                    <a:pt x="2220298" y="2520080"/>
+                  </a:lnTo>
+                  <a:lnTo>
+                    <a:pt x="2148675" y="2511805"/>
+                  </a:lnTo>
+                  <a:lnTo>
+                    <a:pt x="2077053" y="2503458"/>
+                  </a:lnTo>
+                  <a:lnTo>
+                    <a:pt x="2005430" y="2495040"/>
+                  </a:lnTo>
+                  <a:lnTo>
+                    <a:pt x="1933808" y="2486550"/>
+                  </a:lnTo>
+                  <a:lnTo>
+                    <a:pt x="1862185" y="2477987"/>
+                  </a:lnTo>
+                  <a:lnTo>
+                    <a:pt x="1790563" y="2469350"/>
+                  </a:lnTo>
+                  <a:lnTo>
+                    <a:pt x="1718940" y="2460640"/>
+                  </a:lnTo>
+                  <a:lnTo>
+                    <a:pt x="1647318" y="2451854"/>
+                  </a:lnTo>
+                  <a:lnTo>
+                    <a:pt x="1575695" y="2442993"/>
+                  </a:lnTo>
+                  <a:lnTo>
+                    <a:pt x="1504073" y="2434056"/>
+                  </a:lnTo>
+                  <a:lnTo>
+                    <a:pt x="1432450" y="2425042"/>
+                  </a:lnTo>
+                  <a:lnTo>
+                    <a:pt x="1360827" y="2415950"/>
+                  </a:lnTo>
+                  <a:lnTo>
+                    <a:pt x="1289205" y="2406781"/>
+                  </a:lnTo>
+                  <a:lnTo>
+                    <a:pt x="1217582" y="2397533"/>
+                  </a:lnTo>
+                  <a:lnTo>
+                    <a:pt x="1145960" y="2388205"/>
+                  </a:lnTo>
+                  <a:lnTo>
+                    <a:pt x="1074337" y="2378798"/>
+                  </a:lnTo>
+                  <a:lnTo>
+                    <a:pt x="1002715" y="2369309"/>
+                  </a:lnTo>
+                  <a:lnTo>
+                    <a:pt x="931092" y="2359739"/>
+                  </a:lnTo>
+                  <a:lnTo>
+                    <a:pt x="859470" y="2350087"/>
+                  </a:lnTo>
+                  <a:lnTo>
+                    <a:pt x="787847" y="2340352"/>
+                  </a:lnTo>
+                  <a:lnTo>
+                    <a:pt x="716225" y="2330534"/>
+                  </a:lnTo>
+                  <a:lnTo>
+                    <a:pt x="644602" y="2320631"/>
+                  </a:lnTo>
+                  <a:lnTo>
+                    <a:pt x="572980" y="2310643"/>
+                  </a:lnTo>
+                  <a:lnTo>
+                    <a:pt x="501357" y="2300569"/>
+                  </a:lnTo>
+                  <a:lnTo>
+                    <a:pt x="429735" y="2290409"/>
+                  </a:lnTo>
+                  <a:lnTo>
+                    <a:pt x="358112" y="2280162"/>
+                  </a:lnTo>
+                  <a:lnTo>
+                    <a:pt x="286490" y="2269826"/>
+                  </a:lnTo>
+                  <a:lnTo>
+                    <a:pt x="214867" y="2259402"/>
+                  </a:lnTo>
+                  <a:lnTo>
+                    <a:pt x="143245" y="2248889"/>
+                  </a:lnTo>
+                  <a:lnTo>
+                    <a:pt x="71622" y="2238285"/>
+                  </a:lnTo>
+                  <a:lnTo>
+                    <a:pt x="0" y="2227590"/>
                   </a:lnTo>
                   <a:close/>
                 </a:path>
@@ -3945,237 +3945,237 @@
           </p:nvSpPr>
           <p:spPr>
             <a:xfrm>
-              <a:off x="2981433" y="2073503"/>
-              <a:ext cx="5281246" cy="2960320"/>
+              <a:off x="2990309" y="2073503"/>
+              <a:ext cx="5272369" cy="2944966"/>
             </a:xfrm>
             <a:custGeom>
               <a:avLst/>
               <a:pathLst>
-                <a:path w="5281246" h="2960320">
+                <a:path w="5272369" h="2944966">
                   <a:moveTo>
                     <a:pt x="0" y="0"/>
                   </a:moveTo>
                   <a:lnTo>
-                    <a:pt x="52801" y="157441"/>
-                  </a:lnTo>
-                  <a:lnTo>
-                    <a:pt x="124424" y="358116"/>
-                  </a:lnTo>
-                  <a:lnTo>
-                    <a:pt x="196046" y="546684"/>
-                  </a:lnTo>
-                  <a:lnTo>
-                    <a:pt x="267669" y="723877"/>
-                  </a:lnTo>
-                  <a:lnTo>
-                    <a:pt x="339291" y="890379"/>
-                  </a:lnTo>
-                  <a:lnTo>
-                    <a:pt x="410914" y="1046836"/>
-                  </a:lnTo>
-                  <a:lnTo>
-                    <a:pt x="482536" y="1193855"/>
-                  </a:lnTo>
-                  <a:lnTo>
-                    <a:pt x="554159" y="1332003"/>
-                  </a:lnTo>
-                  <a:lnTo>
-                    <a:pt x="625782" y="1461818"/>
-                  </a:lnTo>
-                  <a:lnTo>
-                    <a:pt x="697404" y="1583800"/>
-                  </a:lnTo>
-                  <a:lnTo>
-                    <a:pt x="769027" y="1698423"/>
-                  </a:lnTo>
-                  <a:lnTo>
-                    <a:pt x="840649" y="1806132"/>
-                  </a:lnTo>
-                  <a:lnTo>
-                    <a:pt x="912272" y="1907342"/>
-                  </a:lnTo>
-                  <a:lnTo>
-                    <a:pt x="983894" y="2002446"/>
-                  </a:lnTo>
-                  <a:lnTo>
-                    <a:pt x="1055517" y="2091812"/>
-                  </a:lnTo>
-                  <a:lnTo>
-                    <a:pt x="1127139" y="2175788"/>
-                  </a:lnTo>
-                  <a:lnTo>
-                    <a:pt x="1198762" y="2254696"/>
-                  </a:lnTo>
-                  <a:lnTo>
-                    <a:pt x="1270384" y="2328845"/>
-                  </a:lnTo>
-                  <a:lnTo>
-                    <a:pt x="1342007" y="2398520"/>
-                  </a:lnTo>
-                  <a:lnTo>
-                    <a:pt x="1413629" y="2463991"/>
-                  </a:lnTo>
-                  <a:lnTo>
-                    <a:pt x="1485252" y="2525513"/>
-                  </a:lnTo>
-                  <a:lnTo>
-                    <a:pt x="1556874" y="2583323"/>
-                  </a:lnTo>
-                  <a:lnTo>
-                    <a:pt x="1628497" y="2637645"/>
-                  </a:lnTo>
-                  <a:lnTo>
-                    <a:pt x="1700119" y="2659397"/>
-                  </a:lnTo>
-                  <a:lnTo>
-                    <a:pt x="1771742" y="2666851"/>
-                  </a:lnTo>
-                  <a:lnTo>
-                    <a:pt x="1843364" y="2674239"/>
-                  </a:lnTo>
-                  <a:lnTo>
-                    <a:pt x="1914987" y="2681559"/>
-                  </a:lnTo>
-                  <a:lnTo>
-                    <a:pt x="1986610" y="2688813"/>
-                  </a:lnTo>
-                  <a:lnTo>
-                    <a:pt x="2058232" y="2696001"/>
-                  </a:lnTo>
-                  <a:lnTo>
-                    <a:pt x="2129855" y="2703125"/>
-                  </a:lnTo>
-                  <a:lnTo>
-                    <a:pt x="2201477" y="2710184"/>
-                  </a:lnTo>
-                  <a:lnTo>
-                    <a:pt x="2273100" y="2717179"/>
-                  </a:lnTo>
-                  <a:lnTo>
-                    <a:pt x="2344722" y="2724111"/>
-                  </a:lnTo>
-                  <a:lnTo>
-                    <a:pt x="2416345" y="2730980"/>
-                  </a:lnTo>
-                  <a:lnTo>
-                    <a:pt x="2487967" y="2737787"/>
-                  </a:lnTo>
-                  <a:lnTo>
-                    <a:pt x="2559590" y="2744533"/>
-                  </a:lnTo>
-                  <a:lnTo>
-                    <a:pt x="2631212" y="2751217"/>
-                  </a:lnTo>
-                  <a:lnTo>
-                    <a:pt x="2702835" y="2757841"/>
-                  </a:lnTo>
-                  <a:lnTo>
-                    <a:pt x="2774457" y="2764406"/>
-                  </a:lnTo>
-                  <a:lnTo>
-                    <a:pt x="2846080" y="2770910"/>
-                  </a:lnTo>
-                  <a:lnTo>
-                    <a:pt x="2917702" y="2777356"/>
-                  </a:lnTo>
-                  <a:lnTo>
-                    <a:pt x="2989325" y="2783744"/>
-                  </a:lnTo>
-                  <a:lnTo>
-                    <a:pt x="3060947" y="2790074"/>
-                  </a:lnTo>
-                  <a:lnTo>
-                    <a:pt x="3132570" y="2796347"/>
-                  </a:lnTo>
-                  <a:lnTo>
-                    <a:pt x="3204192" y="2802563"/>
-                  </a:lnTo>
-                  <a:lnTo>
-                    <a:pt x="3275815" y="2808723"/>
-                  </a:lnTo>
-                  <a:lnTo>
-                    <a:pt x="3347438" y="2814827"/>
-                  </a:lnTo>
-                  <a:lnTo>
-                    <a:pt x="3419060" y="2820876"/>
-                  </a:lnTo>
-                  <a:lnTo>
-                    <a:pt x="3490683" y="2826870"/>
-                  </a:lnTo>
-                  <a:lnTo>
-                    <a:pt x="3562305" y="2832810"/>
-                  </a:lnTo>
-                  <a:lnTo>
-                    <a:pt x="3633928" y="2838696"/>
-                  </a:lnTo>
-                  <a:lnTo>
-                    <a:pt x="3705550" y="2844529"/>
-                  </a:lnTo>
-                  <a:lnTo>
-                    <a:pt x="3777173" y="2850310"/>
-                  </a:lnTo>
-                  <a:lnTo>
-                    <a:pt x="3848795" y="2856038"/>
-                  </a:lnTo>
-                  <a:lnTo>
-                    <a:pt x="3920418" y="2861714"/>
-                  </a:lnTo>
-                  <a:lnTo>
-                    <a:pt x="3992040" y="2867339"/>
-                  </a:lnTo>
-                  <a:lnTo>
-                    <a:pt x="4063663" y="2872913"/>
-                  </a:lnTo>
-                  <a:lnTo>
-                    <a:pt x="4135285" y="2878437"/>
-                  </a:lnTo>
-                  <a:lnTo>
-                    <a:pt x="4206908" y="2883910"/>
-                  </a:lnTo>
-                  <a:lnTo>
-                    <a:pt x="4278530" y="2889335"/>
-                  </a:lnTo>
-                  <a:lnTo>
-                    <a:pt x="4350153" y="2894710"/>
-                  </a:lnTo>
-                  <a:lnTo>
-                    <a:pt x="4421775" y="2900036"/>
-                  </a:lnTo>
-                  <a:lnTo>
-                    <a:pt x="4493398" y="2905315"/>
-                  </a:lnTo>
-                  <a:lnTo>
-                    <a:pt x="4565020" y="2910545"/>
-                  </a:lnTo>
-                  <a:lnTo>
-                    <a:pt x="4636643" y="2915729"/>
-                  </a:lnTo>
-                  <a:lnTo>
-                    <a:pt x="4708266" y="2920865"/>
-                  </a:lnTo>
-                  <a:lnTo>
-                    <a:pt x="4779888" y="2925955"/>
-                  </a:lnTo>
-                  <a:lnTo>
-                    <a:pt x="4851511" y="2930999"/>
-                  </a:lnTo>
-                  <a:lnTo>
-                    <a:pt x="4923133" y="2935997"/>
-                  </a:lnTo>
-                  <a:lnTo>
-                    <a:pt x="4994756" y="2940951"/>
-                  </a:lnTo>
-                  <a:lnTo>
-                    <a:pt x="5066378" y="2945859"/>
-                  </a:lnTo>
-                  <a:lnTo>
-                    <a:pt x="5138001" y="2950723"/>
-                  </a:lnTo>
-                  <a:lnTo>
-                    <a:pt x="5209623" y="2955543"/>
-                  </a:lnTo>
-                  <a:lnTo>
-                    <a:pt x="5281246" y="2960320"/>
+                    <a:pt x="43925" y="131427"/>
+                  </a:lnTo>
+                  <a:lnTo>
+                    <a:pt x="115547" y="332850"/>
+                  </a:lnTo>
+                  <a:lnTo>
+                    <a:pt x="187170" y="522171"/>
+                  </a:lnTo>
+                  <a:lnTo>
+                    <a:pt x="258792" y="700116"/>
+                  </a:lnTo>
+                  <a:lnTo>
+                    <a:pt x="330415" y="867370"/>
+                  </a:lnTo>
+                  <a:lnTo>
+                    <a:pt x="402037" y="1024574"/>
+                  </a:lnTo>
+                  <a:lnTo>
+                    <a:pt x="473660" y="1172333"/>
+                  </a:lnTo>
+                  <a:lnTo>
+                    <a:pt x="545282" y="1311213"/>
+                  </a:lnTo>
+                  <a:lnTo>
+                    <a:pt x="616905" y="1441749"/>
+                  </a:lnTo>
+                  <a:lnTo>
+                    <a:pt x="688527" y="1564442"/>
+                  </a:lnTo>
+                  <a:lnTo>
+                    <a:pt x="760150" y="1679763"/>
+                  </a:lnTo>
+                  <a:lnTo>
+                    <a:pt x="831772" y="1788155"/>
+                  </a:lnTo>
+                  <a:lnTo>
+                    <a:pt x="903395" y="1890034"/>
+                  </a:lnTo>
+                  <a:lnTo>
+                    <a:pt x="975018" y="1985792"/>
+                  </a:lnTo>
+                  <a:lnTo>
+                    <a:pt x="1046640" y="2075796"/>
+                  </a:lnTo>
+                  <a:lnTo>
+                    <a:pt x="1118263" y="2160392"/>
+                  </a:lnTo>
+                  <a:lnTo>
+                    <a:pt x="1189885" y="2239906"/>
+                  </a:lnTo>
+                  <a:lnTo>
+                    <a:pt x="1261508" y="2314641"/>
+                  </a:lnTo>
+                  <a:lnTo>
+                    <a:pt x="1333130" y="2384887"/>
+                  </a:lnTo>
+                  <a:lnTo>
+                    <a:pt x="1404753" y="2450911"/>
+                  </a:lnTo>
+                  <a:lnTo>
+                    <a:pt x="1476375" y="2512969"/>
+                  </a:lnTo>
+                  <a:lnTo>
+                    <a:pt x="1547998" y="2571298"/>
+                  </a:lnTo>
+                  <a:lnTo>
+                    <a:pt x="1619620" y="2626122"/>
+                  </a:lnTo>
+                  <a:lnTo>
+                    <a:pt x="1691243" y="2657547"/>
+                  </a:lnTo>
+                  <a:lnTo>
+                    <a:pt x="1762865" y="2664582"/>
+                  </a:lnTo>
+                  <a:lnTo>
+                    <a:pt x="1834488" y="2671556"/>
+                  </a:lnTo>
+                  <a:lnTo>
+                    <a:pt x="1906110" y="2678471"/>
+                  </a:lnTo>
+                  <a:lnTo>
+                    <a:pt x="1977733" y="2685327"/>
+                  </a:lnTo>
+                  <a:lnTo>
+                    <a:pt x="2049355" y="2692125"/>
+                  </a:lnTo>
+                  <a:lnTo>
+                    <a:pt x="2120978" y="2698865"/>
+                  </a:lnTo>
+                  <a:lnTo>
+                    <a:pt x="2192600" y="2705548"/>
+                  </a:lnTo>
+                  <a:lnTo>
+                    <a:pt x="2264223" y="2712173"/>
+                  </a:lnTo>
+                  <a:lnTo>
+                    <a:pt x="2335846" y="2718743"/>
+                  </a:lnTo>
+                  <a:lnTo>
+                    <a:pt x="2407468" y="2725256"/>
+                  </a:lnTo>
+                  <a:lnTo>
+                    <a:pt x="2479091" y="2731714"/>
+                  </a:lnTo>
+                  <a:lnTo>
+                    <a:pt x="2550713" y="2738117"/>
+                  </a:lnTo>
+                  <a:lnTo>
+                    <a:pt x="2622336" y="2744465"/>
+                  </a:lnTo>
+                  <a:lnTo>
+                    <a:pt x="2693958" y="2750759"/>
+                  </a:lnTo>
+                  <a:lnTo>
+                    <a:pt x="2765581" y="2757000"/>
+                  </a:lnTo>
+                  <a:lnTo>
+                    <a:pt x="2837203" y="2763188"/>
+                  </a:lnTo>
+                  <a:lnTo>
+                    <a:pt x="2908826" y="2769323"/>
+                  </a:lnTo>
+                  <a:lnTo>
+                    <a:pt x="2980448" y="2775405"/>
+                  </a:lnTo>
+                  <a:lnTo>
+                    <a:pt x="3052071" y="2781436"/>
+                  </a:lnTo>
+                  <a:lnTo>
+                    <a:pt x="3123693" y="2787416"/>
+                  </a:lnTo>
+                  <a:lnTo>
+                    <a:pt x="3195316" y="2793344"/>
+                  </a:lnTo>
+                  <a:lnTo>
+                    <a:pt x="3266938" y="2799222"/>
+                  </a:lnTo>
+                  <a:lnTo>
+                    <a:pt x="3338561" y="2805051"/>
+                  </a:lnTo>
+                  <a:lnTo>
+                    <a:pt x="3410183" y="2810829"/>
+                  </a:lnTo>
+                  <a:lnTo>
+                    <a:pt x="3481806" y="2816558"/>
+                  </a:lnTo>
+                  <a:lnTo>
+                    <a:pt x="3553428" y="2822239"/>
+                  </a:lnTo>
+                  <a:lnTo>
+                    <a:pt x="3625051" y="2827871"/>
+                  </a:lnTo>
+                  <a:lnTo>
+                    <a:pt x="3696674" y="2833455"/>
+                  </a:lnTo>
+                  <a:lnTo>
+                    <a:pt x="3768296" y="2838992"/>
+                  </a:lnTo>
+                  <a:lnTo>
+                    <a:pt x="3839919" y="2844481"/>
+                  </a:lnTo>
+                  <a:lnTo>
+                    <a:pt x="3911541" y="2849924"/>
+                  </a:lnTo>
+                  <a:lnTo>
+                    <a:pt x="3983164" y="2855320"/>
+                  </a:lnTo>
+                  <a:lnTo>
+                    <a:pt x="4054786" y="2860671"/>
+                  </a:lnTo>
+                  <a:lnTo>
+                    <a:pt x="4126409" y="2865976"/>
+                  </a:lnTo>
+                  <a:lnTo>
+                    <a:pt x="4198031" y="2871236"/>
+                  </a:lnTo>
+                  <a:lnTo>
+                    <a:pt x="4269654" y="2876451"/>
+                  </a:lnTo>
+                  <a:lnTo>
+                    <a:pt x="4341276" y="2881621"/>
+                  </a:lnTo>
+                  <a:lnTo>
+                    <a:pt x="4412899" y="2886748"/>
+                  </a:lnTo>
+                  <a:lnTo>
+                    <a:pt x="4484521" y="2891831"/>
+                  </a:lnTo>
+                  <a:lnTo>
+                    <a:pt x="4556144" y="2896870"/>
+                  </a:lnTo>
+                  <a:lnTo>
+                    <a:pt x="4627766" y="2901867"/>
+                  </a:lnTo>
+                  <a:lnTo>
+                    <a:pt x="4699389" y="2906821"/>
+                  </a:lnTo>
+                  <a:lnTo>
+                    <a:pt x="4771011" y="2911733"/>
+                  </a:lnTo>
+                  <a:lnTo>
+                    <a:pt x="4842634" y="2916603"/>
+                  </a:lnTo>
+                  <a:lnTo>
+                    <a:pt x="4914256" y="2921432"/>
+                  </a:lnTo>
+                  <a:lnTo>
+                    <a:pt x="4985879" y="2926220"/>
+                  </a:lnTo>
+                  <a:lnTo>
+                    <a:pt x="5057502" y="2930966"/>
+                  </a:lnTo>
+                  <a:lnTo>
+                    <a:pt x="5129124" y="2935673"/>
+                  </a:lnTo>
+                  <a:lnTo>
+                    <a:pt x="5200747" y="2940339"/>
+                  </a:lnTo>
+                  <a:lnTo>
+                    <a:pt x="5272369" y="2944966"/>
                   </a:lnTo>
                 </a:path>
               </a:pathLst>
@@ -4195,309 +4195,309 @@
           </p:nvSpPr>
           <p:spPr>
             <a:xfrm>
-              <a:off x="1172049" y="4270715"/>
-              <a:ext cx="7090630" cy="1251121"/>
+              <a:off x="1172049" y="4301093"/>
+              <a:ext cx="7090630" cy="1219780"/>
             </a:xfrm>
             <a:custGeom>
               <a:avLst/>
               <a:pathLst>
-                <a:path w="7090630" h="1251121">
+                <a:path w="7090630" h="1219780">
                   <a:moveTo>
-                    <a:pt x="7090630" y="1251121"/>
+                    <a:pt x="7090630" y="1219780"/>
                   </a:moveTo>
                   <a:lnTo>
-                    <a:pt x="7019007" y="1248847"/>
-                  </a:lnTo>
-                  <a:lnTo>
-                    <a:pt x="6947385" y="1246427"/>
-                  </a:lnTo>
-                  <a:lnTo>
-                    <a:pt x="6875762" y="1243852"/>
-                  </a:lnTo>
-                  <a:lnTo>
-                    <a:pt x="6804139" y="1241112"/>
-                  </a:lnTo>
-                  <a:lnTo>
-                    <a:pt x="6732517" y="1238196"/>
-                  </a:lnTo>
-                  <a:lnTo>
-                    <a:pt x="6660894" y="1235092"/>
-                  </a:lnTo>
-                  <a:lnTo>
-                    <a:pt x="6589272" y="1231789"/>
-                  </a:lnTo>
-                  <a:lnTo>
-                    <a:pt x="6517649" y="1228275"/>
-                  </a:lnTo>
-                  <a:lnTo>
-                    <a:pt x="6446027" y="1224534"/>
-                  </a:lnTo>
-                  <a:lnTo>
-                    <a:pt x="6374404" y="1220554"/>
-                  </a:lnTo>
-                  <a:lnTo>
-                    <a:pt x="6302782" y="1216317"/>
-                  </a:lnTo>
-                  <a:lnTo>
-                    <a:pt x="6231159" y="1211809"/>
-                  </a:lnTo>
-                  <a:lnTo>
-                    <a:pt x="6159537" y="1207012"/>
-                  </a:lnTo>
-                  <a:lnTo>
-                    <a:pt x="6087914" y="1201906"/>
-                  </a:lnTo>
-                  <a:lnTo>
-                    <a:pt x="6016292" y="1196473"/>
-                  </a:lnTo>
-                  <a:lnTo>
-                    <a:pt x="5944669" y="1190690"/>
-                  </a:lnTo>
-                  <a:lnTo>
-                    <a:pt x="5873047" y="1184537"/>
-                  </a:lnTo>
-                  <a:lnTo>
-                    <a:pt x="5801424" y="1177988"/>
-                  </a:lnTo>
-                  <a:lnTo>
-                    <a:pt x="5729802" y="1171020"/>
-                  </a:lnTo>
-                  <a:lnTo>
-                    <a:pt x="5658179" y="1163603"/>
-                  </a:lnTo>
-                  <a:lnTo>
-                    <a:pt x="5586557" y="1155711"/>
-                  </a:lnTo>
-                  <a:lnTo>
-                    <a:pt x="5514934" y="1147311"/>
-                  </a:lnTo>
-                  <a:lnTo>
-                    <a:pt x="5443311" y="1138373"/>
-                  </a:lnTo>
-                  <a:lnTo>
-                    <a:pt x="5371689" y="1128860"/>
-                  </a:lnTo>
-                  <a:lnTo>
-                    <a:pt x="5300066" y="1118737"/>
-                  </a:lnTo>
-                  <a:lnTo>
-                    <a:pt x="5228444" y="1107964"/>
-                  </a:lnTo>
-                  <a:lnTo>
-                    <a:pt x="5156821" y="1096499"/>
-                  </a:lnTo>
-                  <a:lnTo>
-                    <a:pt x="5085199" y="1084298"/>
-                  </a:lnTo>
-                  <a:lnTo>
-                    <a:pt x="5013576" y="1071314"/>
-                  </a:lnTo>
-                  <a:lnTo>
-                    <a:pt x="4941954" y="1057496"/>
-                  </a:lnTo>
-                  <a:lnTo>
-                    <a:pt x="4870331" y="1042792"/>
-                  </a:lnTo>
-                  <a:lnTo>
-                    <a:pt x="4798709" y="1027142"/>
-                  </a:lnTo>
-                  <a:lnTo>
-                    <a:pt x="4727086" y="1010489"/>
-                  </a:lnTo>
-                  <a:lnTo>
-                    <a:pt x="4655464" y="992766"/>
-                  </a:lnTo>
-                  <a:lnTo>
-                    <a:pt x="4583841" y="973905"/>
-                  </a:lnTo>
-                  <a:lnTo>
-                    <a:pt x="4512219" y="953833"/>
-                  </a:lnTo>
-                  <a:lnTo>
-                    <a:pt x="4440596" y="932473"/>
-                  </a:lnTo>
-                  <a:lnTo>
-                    <a:pt x="4368974" y="909741"/>
-                  </a:lnTo>
-                  <a:lnTo>
-                    <a:pt x="4297351" y="885549"/>
-                  </a:lnTo>
-                  <a:lnTo>
-                    <a:pt x="4225729" y="859805"/>
-                  </a:lnTo>
-                  <a:lnTo>
-                    <a:pt x="4154106" y="832408"/>
-                  </a:lnTo>
-                  <a:lnTo>
-                    <a:pt x="4082483" y="803251"/>
-                  </a:lnTo>
-                  <a:lnTo>
-                    <a:pt x="4010861" y="772223"/>
-                  </a:lnTo>
-                  <a:lnTo>
-                    <a:pt x="3939238" y="739203"/>
-                  </a:lnTo>
-                  <a:lnTo>
-                    <a:pt x="3867616" y="704062"/>
-                  </a:lnTo>
-                  <a:lnTo>
-                    <a:pt x="3795993" y="666666"/>
-                  </a:lnTo>
-                  <a:lnTo>
-                    <a:pt x="3724371" y="626868"/>
-                  </a:lnTo>
-                  <a:lnTo>
-                    <a:pt x="3652748" y="584515"/>
-                  </a:lnTo>
-                  <a:lnTo>
-                    <a:pt x="3581126" y="539444"/>
-                  </a:lnTo>
-                  <a:lnTo>
-                    <a:pt x="3509503" y="491478"/>
-                  </a:lnTo>
-                  <a:lnTo>
-                    <a:pt x="3437881" y="454662"/>
-                  </a:lnTo>
-                  <a:lnTo>
-                    <a:pt x="3366258" y="447071"/>
-                  </a:lnTo>
-                  <a:lnTo>
-                    <a:pt x="3294636" y="439411"/>
-                  </a:lnTo>
-                  <a:lnTo>
-                    <a:pt x="3223013" y="431681"/>
-                  </a:lnTo>
-                  <a:lnTo>
-                    <a:pt x="3151391" y="423880"/>
-                  </a:lnTo>
-                  <a:lnTo>
-                    <a:pt x="3079768" y="416008"/>
-                  </a:lnTo>
-                  <a:lnTo>
-                    <a:pt x="3008146" y="408064"/>
-                  </a:lnTo>
-                  <a:lnTo>
-                    <a:pt x="2936523" y="400048"/>
-                  </a:lnTo>
-                  <a:lnTo>
-                    <a:pt x="2864901" y="391958"/>
-                  </a:lnTo>
-                  <a:lnTo>
-                    <a:pt x="2793278" y="383795"/>
-                  </a:lnTo>
-                  <a:lnTo>
-                    <a:pt x="2721655" y="375557"/>
-                  </a:lnTo>
-                  <a:lnTo>
-                    <a:pt x="2650033" y="367244"/>
-                  </a:lnTo>
-                  <a:lnTo>
-                    <a:pt x="2578410" y="358855"/>
-                  </a:lnTo>
-                  <a:lnTo>
-                    <a:pt x="2506788" y="350390"/>
-                  </a:lnTo>
-                  <a:lnTo>
-                    <a:pt x="2435165" y="341847"/>
-                  </a:lnTo>
-                  <a:lnTo>
-                    <a:pt x="2363543" y="333227"/>
-                  </a:lnTo>
-                  <a:lnTo>
-                    <a:pt x="2291920" y="324527"/>
-                  </a:lnTo>
-                  <a:lnTo>
-                    <a:pt x="2220298" y="315749"/>
-                  </a:lnTo>
-                  <a:lnTo>
-                    <a:pt x="2148675" y="306890"/>
-                  </a:lnTo>
-                  <a:lnTo>
-                    <a:pt x="2077053" y="297951"/>
-                  </a:lnTo>
-                  <a:lnTo>
-                    <a:pt x="2005430" y="288929"/>
-                  </a:lnTo>
-                  <a:lnTo>
-                    <a:pt x="1933808" y="279826"/>
-                  </a:lnTo>
-                  <a:lnTo>
-                    <a:pt x="1862185" y="270639"/>
-                  </a:lnTo>
-                  <a:lnTo>
-                    <a:pt x="1790563" y="261369"/>
-                  </a:lnTo>
-                  <a:lnTo>
-                    <a:pt x="1718940" y="252014"/>
-                  </a:lnTo>
-                  <a:lnTo>
-                    <a:pt x="1647318" y="242574"/>
-                  </a:lnTo>
-                  <a:lnTo>
-                    <a:pt x="1575695" y="233047"/>
-                  </a:lnTo>
-                  <a:lnTo>
-                    <a:pt x="1504073" y="223434"/>
-                  </a:lnTo>
-                  <a:lnTo>
-                    <a:pt x="1432450" y="213733"/>
-                  </a:lnTo>
-                  <a:lnTo>
-                    <a:pt x="1360827" y="203943"/>
-                  </a:lnTo>
-                  <a:lnTo>
-                    <a:pt x="1289205" y="194064"/>
-                  </a:lnTo>
-                  <a:lnTo>
-                    <a:pt x="1217582" y="184095"/>
-                  </a:lnTo>
-                  <a:lnTo>
-                    <a:pt x="1145960" y="174035"/>
-                  </a:lnTo>
-                  <a:lnTo>
-                    <a:pt x="1074337" y="163883"/>
-                  </a:lnTo>
-                  <a:lnTo>
-                    <a:pt x="1002715" y="153638"/>
-                  </a:lnTo>
-                  <a:lnTo>
-                    <a:pt x="931092" y="143300"/>
-                  </a:lnTo>
-                  <a:lnTo>
-                    <a:pt x="859470" y="132868"/>
-                  </a:lnTo>
-                  <a:lnTo>
-                    <a:pt x="787847" y="122340"/>
-                  </a:lnTo>
-                  <a:lnTo>
-                    <a:pt x="716225" y="111717"/>
-                  </a:lnTo>
-                  <a:lnTo>
-                    <a:pt x="644602" y="100996"/>
-                  </a:lnTo>
-                  <a:lnTo>
-                    <a:pt x="572980" y="90178"/>
-                  </a:lnTo>
-                  <a:lnTo>
-                    <a:pt x="501357" y="79260"/>
-                  </a:lnTo>
-                  <a:lnTo>
-                    <a:pt x="429735" y="68244"/>
-                  </a:lnTo>
-                  <a:lnTo>
-                    <a:pt x="358112" y="57126"/>
-                  </a:lnTo>
-                  <a:lnTo>
-                    <a:pt x="286490" y="45908"/>
-                  </a:lnTo>
-                  <a:lnTo>
-                    <a:pt x="214867" y="34587"/>
-                  </a:lnTo>
-                  <a:lnTo>
-                    <a:pt x="143245" y="23162"/>
-                  </a:lnTo>
-                  <a:lnTo>
-                    <a:pt x="71622" y="11633"/>
+                    <a:pt x="7019007" y="1217454"/>
+                  </a:lnTo>
+                  <a:lnTo>
+                    <a:pt x="6947385" y="1214980"/>
+                  </a:lnTo>
+                  <a:lnTo>
+                    <a:pt x="6875762" y="1212348"/>
+                  </a:lnTo>
+                  <a:lnTo>
+                    <a:pt x="6804139" y="1209548"/>
+                  </a:lnTo>
+                  <a:lnTo>
+                    <a:pt x="6732517" y="1206568"/>
+                  </a:lnTo>
+                  <a:lnTo>
+                    <a:pt x="6660894" y="1203398"/>
+                  </a:lnTo>
+                  <a:lnTo>
+                    <a:pt x="6589272" y="1200026"/>
+                  </a:lnTo>
+                  <a:lnTo>
+                    <a:pt x="6517649" y="1196438"/>
+                  </a:lnTo>
+                  <a:lnTo>
+                    <a:pt x="6446027" y="1192620"/>
+                  </a:lnTo>
+                  <a:lnTo>
+                    <a:pt x="6374404" y="1188558"/>
+                  </a:lnTo>
+                  <a:lnTo>
+                    <a:pt x="6302782" y="1184237"/>
+                  </a:lnTo>
+                  <a:lnTo>
+                    <a:pt x="6231159" y="1179640"/>
+                  </a:lnTo>
+                  <a:lnTo>
+                    <a:pt x="6159537" y="1174748"/>
+                  </a:lnTo>
+                  <a:lnTo>
+                    <a:pt x="6087914" y="1169544"/>
+                  </a:lnTo>
+                  <a:lnTo>
+                    <a:pt x="6016292" y="1164007"/>
+                  </a:lnTo>
+                  <a:lnTo>
+                    <a:pt x="5944669" y="1158117"/>
+                  </a:lnTo>
+                  <a:lnTo>
+                    <a:pt x="5873047" y="1151849"/>
+                  </a:lnTo>
+                  <a:lnTo>
+                    <a:pt x="5801424" y="1145182"/>
+                  </a:lnTo>
+                  <a:lnTo>
+                    <a:pt x="5729802" y="1138087"/>
+                  </a:lnTo>
+                  <a:lnTo>
+                    <a:pt x="5658179" y="1130540"/>
+                  </a:lnTo>
+                  <a:lnTo>
+                    <a:pt x="5586557" y="1122510"/>
+                  </a:lnTo>
+                  <a:lnTo>
+                    <a:pt x="5514934" y="1113966"/>
+                  </a:lnTo>
+                  <a:lnTo>
+                    <a:pt x="5443311" y="1104877"/>
+                  </a:lnTo>
+                  <a:lnTo>
+                    <a:pt x="5371689" y="1095206"/>
+                  </a:lnTo>
+                  <a:lnTo>
+                    <a:pt x="5300066" y="1084917"/>
+                  </a:lnTo>
+                  <a:lnTo>
+                    <a:pt x="5228444" y="1073970"/>
+                  </a:lnTo>
+                  <a:lnTo>
+                    <a:pt x="5156821" y="1062324"/>
+                  </a:lnTo>
+                  <a:lnTo>
+                    <a:pt x="5085199" y="1049933"/>
+                  </a:lnTo>
+                  <a:lnTo>
+                    <a:pt x="5013576" y="1036750"/>
+                  </a:lnTo>
+                  <a:lnTo>
+                    <a:pt x="4941954" y="1022725"/>
+                  </a:lnTo>
+                  <a:lnTo>
+                    <a:pt x="4870331" y="1007802"/>
+                  </a:lnTo>
+                  <a:lnTo>
+                    <a:pt x="4798709" y="991926"/>
+                  </a:lnTo>
+                  <a:lnTo>
+                    <a:pt x="4727086" y="975035"/>
+                  </a:lnTo>
+                  <a:lnTo>
+                    <a:pt x="4655464" y="957064"/>
+                  </a:lnTo>
+                  <a:lnTo>
+                    <a:pt x="4583841" y="937944"/>
+                  </a:lnTo>
+                  <a:lnTo>
+                    <a:pt x="4512219" y="917603"/>
+                  </a:lnTo>
+                  <a:lnTo>
+                    <a:pt x="4440596" y="895960"/>
+                  </a:lnTo>
+                  <a:lnTo>
+                    <a:pt x="4368974" y="872934"/>
+                  </a:lnTo>
+                  <a:lnTo>
+                    <a:pt x="4297351" y="848437"/>
+                  </a:lnTo>
+                  <a:lnTo>
+                    <a:pt x="4225729" y="822373"/>
+                  </a:lnTo>
+                  <a:lnTo>
+                    <a:pt x="4154106" y="794643"/>
+                  </a:lnTo>
+                  <a:lnTo>
+                    <a:pt x="4082483" y="765141"/>
+                  </a:lnTo>
+                  <a:lnTo>
+                    <a:pt x="4010861" y="733752"/>
+                  </a:lnTo>
+                  <a:lnTo>
+                    <a:pt x="3939238" y="700357"/>
+                  </a:lnTo>
+                  <a:lnTo>
+                    <a:pt x="3867616" y="664827"/>
+                  </a:lnTo>
+                  <a:lnTo>
+                    <a:pt x="3795993" y="627026"/>
+                  </a:lnTo>
+                  <a:lnTo>
+                    <a:pt x="3724371" y="586808"/>
+                  </a:lnTo>
+                  <a:lnTo>
+                    <a:pt x="3652748" y="544020"/>
+                  </a:lnTo>
+                  <a:lnTo>
+                    <a:pt x="3581126" y="498496"/>
+                  </a:lnTo>
+                  <a:lnTo>
+                    <a:pt x="3509503" y="450062"/>
+                  </a:lnTo>
+                  <a:lnTo>
+                    <a:pt x="3437881" y="422863"/>
+                  </a:lnTo>
+                  <a:lnTo>
+                    <a:pt x="3366258" y="415707"/>
+                  </a:lnTo>
+                  <a:lnTo>
+                    <a:pt x="3294636" y="408490"/>
+                  </a:lnTo>
+                  <a:lnTo>
+                    <a:pt x="3223013" y="401211"/>
+                  </a:lnTo>
+                  <a:lnTo>
+                    <a:pt x="3151391" y="393869"/>
+                  </a:lnTo>
+                  <a:lnTo>
+                    <a:pt x="3079768" y="386465"/>
+                  </a:lnTo>
+                  <a:lnTo>
+                    <a:pt x="3008146" y="378996"/>
+                  </a:lnTo>
+                  <a:lnTo>
+                    <a:pt x="2936523" y="371464"/>
+                  </a:lnTo>
+                  <a:lnTo>
+                    <a:pt x="2864901" y="363867"/>
+                  </a:lnTo>
+                  <a:lnTo>
+                    <a:pt x="2793278" y="356205"/>
+                  </a:lnTo>
+                  <a:lnTo>
+                    <a:pt x="2721655" y="348477"/>
+                  </a:lnTo>
+                  <a:lnTo>
+                    <a:pt x="2650033" y="340682"/>
+                  </a:lnTo>
+                  <a:lnTo>
+                    <a:pt x="2578410" y="332821"/>
+                  </a:lnTo>
+                  <a:lnTo>
+                    <a:pt x="2506788" y="324892"/>
+                  </a:lnTo>
+                  <a:lnTo>
+                    <a:pt x="2435165" y="316895"/>
+                  </a:lnTo>
+                  <a:lnTo>
+                    <a:pt x="2363543" y="308829"/>
+                  </a:lnTo>
+                  <a:lnTo>
+                    <a:pt x="2291920" y="300695"/>
+                  </a:lnTo>
+                  <a:lnTo>
+                    <a:pt x="2220298" y="292490"/>
+                  </a:lnTo>
+                  <a:lnTo>
+                    <a:pt x="2148675" y="284215"/>
+                  </a:lnTo>
+                  <a:lnTo>
+                    <a:pt x="2077053" y="275868"/>
+                  </a:lnTo>
+                  <a:lnTo>
+                    <a:pt x="2005430" y="267450"/>
+                  </a:lnTo>
+                  <a:lnTo>
+                    <a:pt x="1933808" y="258960"/>
+                  </a:lnTo>
+                  <a:lnTo>
+                    <a:pt x="1862185" y="250397"/>
+                  </a:lnTo>
+                  <a:lnTo>
+                    <a:pt x="1790563" y="241760"/>
+                  </a:lnTo>
+                  <a:lnTo>
+                    <a:pt x="1718940" y="233050"/>
+                  </a:lnTo>
+                  <a:lnTo>
+                    <a:pt x="1647318" y="224264"/>
+                  </a:lnTo>
+                  <a:lnTo>
+                    <a:pt x="1575695" y="215403"/>
+                  </a:lnTo>
+                  <a:lnTo>
+                    <a:pt x="1504073" y="206466"/>
+                  </a:lnTo>
+                  <a:lnTo>
+                    <a:pt x="1432450" y="197452"/>
+                  </a:lnTo>
+                  <a:lnTo>
+                    <a:pt x="1360827" y="188360"/>
+                  </a:lnTo>
+                  <a:lnTo>
+                    <a:pt x="1289205" y="179191"/>
+                  </a:lnTo>
+                  <a:lnTo>
+                    <a:pt x="1217582" y="169943"/>
+                  </a:lnTo>
+                  <a:lnTo>
+                    <a:pt x="1145960" y="160615"/>
+                  </a:lnTo>
+                  <a:lnTo>
+                    <a:pt x="1074337" y="151208"/>
+                  </a:lnTo>
+                  <a:lnTo>
+                    <a:pt x="1002715" y="141719"/>
+                  </a:lnTo>
+                  <a:lnTo>
+                    <a:pt x="931092" y="132149"/>
+                  </a:lnTo>
+                  <a:lnTo>
+                    <a:pt x="859470" y="122497"/>
+                  </a:lnTo>
+                  <a:lnTo>
+                    <a:pt x="787847" y="112762"/>
+                  </a:lnTo>
+                  <a:lnTo>
+                    <a:pt x="716225" y="102944"/>
+                  </a:lnTo>
+                  <a:lnTo>
+                    <a:pt x="644602" y="93041"/>
+                  </a:lnTo>
+                  <a:lnTo>
+                    <a:pt x="572980" y="83053"/>
+                  </a:lnTo>
+                  <a:lnTo>
+                    <a:pt x="501357" y="72979"/>
+                  </a:lnTo>
+                  <a:lnTo>
+                    <a:pt x="429735" y="62819"/>
+                  </a:lnTo>
+                  <a:lnTo>
+                    <a:pt x="358112" y="52572"/>
+                  </a:lnTo>
+                  <a:lnTo>
+                    <a:pt x="286490" y="42236"/>
+                  </a:lnTo>
+                  <a:lnTo>
+                    <a:pt x="214867" y="31812"/>
+                  </a:lnTo>
+                  <a:lnTo>
+                    <a:pt x="143245" y="21299"/>
+                  </a:lnTo>
+                  <a:lnTo>
+                    <a:pt x="71622" y="10695"/>
                   </a:lnTo>
                   <a:lnTo>
                     <a:pt x="0" y="0"/>
@@ -4520,288 +4520,291 @@
           </p:nvSpPr>
           <p:spPr>
             <a:xfrm>
-              <a:off x="1750134" y="2073503"/>
-              <a:ext cx="6512544" cy="3347598"/>
+              <a:off x="1733488" y="2073503"/>
+              <a:ext cx="6529190" cy="3343750"/>
             </a:xfrm>
             <a:custGeom>
               <a:avLst/>
               <a:pathLst>
-                <a:path w="6512544" h="3347598">
+                <a:path w="6529190" h="3343750">
                   <a:moveTo>
                     <a:pt x="0" y="0"/>
                   </a:moveTo>
                   <a:lnTo>
-                    <a:pt x="66517" y="113610"/>
-                  </a:lnTo>
-                  <a:lnTo>
-                    <a:pt x="138139" y="231656"/>
-                  </a:lnTo>
-                  <a:lnTo>
-                    <a:pt x="209762" y="345567"/>
-                  </a:lnTo>
-                  <a:lnTo>
-                    <a:pt x="281384" y="455488"/>
-                  </a:lnTo>
-                  <a:lnTo>
-                    <a:pt x="353007" y="561558"/>
-                  </a:lnTo>
-                  <a:lnTo>
-                    <a:pt x="424629" y="663914"/>
-                  </a:lnTo>
-                  <a:lnTo>
-                    <a:pt x="496252" y="762684"/>
-                  </a:lnTo>
-                  <a:lnTo>
-                    <a:pt x="567874" y="857994"/>
-                  </a:lnTo>
-                  <a:lnTo>
-                    <a:pt x="639497" y="949967"/>
-                  </a:lnTo>
-                  <a:lnTo>
-                    <a:pt x="711119" y="1038717"/>
-                  </a:lnTo>
-                  <a:lnTo>
-                    <a:pt x="782742" y="1124359"/>
-                  </a:lnTo>
-                  <a:lnTo>
-                    <a:pt x="854365" y="1207001"/>
-                  </a:lnTo>
-                  <a:lnTo>
-                    <a:pt x="925987" y="1286749"/>
-                  </a:lnTo>
-                  <a:lnTo>
-                    <a:pt x="997610" y="1363703"/>
-                  </a:lnTo>
-                  <a:lnTo>
-                    <a:pt x="1069232" y="1437962"/>
-                  </a:lnTo>
-                  <a:lnTo>
-                    <a:pt x="1140855" y="1509619"/>
-                  </a:lnTo>
-                  <a:lnTo>
-                    <a:pt x="1212477" y="1578767"/>
-                  </a:lnTo>
-                  <a:lnTo>
-                    <a:pt x="1284100" y="1645493"/>
-                  </a:lnTo>
-                  <a:lnTo>
-                    <a:pt x="1355722" y="1709881"/>
-                  </a:lnTo>
-                  <a:lnTo>
-                    <a:pt x="1427345" y="1772014"/>
-                  </a:lnTo>
-                  <a:lnTo>
-                    <a:pt x="1498967" y="1831971"/>
-                  </a:lnTo>
-                  <a:lnTo>
-                    <a:pt x="1570590" y="1889828"/>
-                  </a:lnTo>
-                  <a:lnTo>
-                    <a:pt x="1642212" y="1945658"/>
-                  </a:lnTo>
-                  <a:lnTo>
-                    <a:pt x="1713835" y="1999532"/>
-                  </a:lnTo>
-                  <a:lnTo>
-                    <a:pt x="1785457" y="2051520"/>
-                  </a:lnTo>
-                  <a:lnTo>
-                    <a:pt x="1857080" y="2101686"/>
-                  </a:lnTo>
-                  <a:lnTo>
-                    <a:pt x="1928702" y="2150096"/>
-                  </a:lnTo>
-                  <a:lnTo>
-                    <a:pt x="2000325" y="2196810"/>
-                  </a:lnTo>
-                  <a:lnTo>
-                    <a:pt x="2071947" y="2241887"/>
-                  </a:lnTo>
-                  <a:lnTo>
-                    <a:pt x="2143570" y="2285386"/>
-                  </a:lnTo>
-                  <a:lnTo>
-                    <a:pt x="2215193" y="2327361"/>
-                  </a:lnTo>
-                  <a:lnTo>
-                    <a:pt x="2286815" y="2367865"/>
-                  </a:lnTo>
-                  <a:lnTo>
-                    <a:pt x="2358438" y="2406951"/>
-                  </a:lnTo>
-                  <a:lnTo>
-                    <a:pt x="2430060" y="2444668"/>
-                  </a:lnTo>
-                  <a:lnTo>
-                    <a:pt x="2501683" y="2481064"/>
-                  </a:lnTo>
-                  <a:lnTo>
-                    <a:pt x="2573305" y="2516185"/>
-                  </a:lnTo>
-                  <a:lnTo>
-                    <a:pt x="2644928" y="2550076"/>
-                  </a:lnTo>
-                  <a:lnTo>
-                    <a:pt x="2716550" y="2582779"/>
-                  </a:lnTo>
-                  <a:lnTo>
-                    <a:pt x="2788173" y="2614337"/>
-                  </a:lnTo>
-                  <a:lnTo>
-                    <a:pt x="2859795" y="2644790"/>
-                  </a:lnTo>
-                  <a:lnTo>
-                    <a:pt x="2931418" y="2674176"/>
-                  </a:lnTo>
-                  <a:lnTo>
-                    <a:pt x="3003040" y="2702533"/>
-                  </a:lnTo>
-                  <a:lnTo>
-                    <a:pt x="3074663" y="2729896"/>
-                  </a:lnTo>
-                  <a:lnTo>
-                    <a:pt x="3146285" y="2756302"/>
-                  </a:lnTo>
-                  <a:lnTo>
-                    <a:pt x="3217908" y="2781782"/>
-                  </a:lnTo>
-                  <a:lnTo>
-                    <a:pt x="3289530" y="2806369"/>
-                  </a:lnTo>
-                  <a:lnTo>
-                    <a:pt x="3361153" y="2830096"/>
-                  </a:lnTo>
-                  <a:lnTo>
-                    <a:pt x="3432775" y="2852991"/>
-                  </a:lnTo>
-                  <a:lnTo>
-                    <a:pt x="3504398" y="2875085"/>
-                  </a:lnTo>
-                  <a:lnTo>
-                    <a:pt x="3576021" y="2896404"/>
-                  </a:lnTo>
-                  <a:lnTo>
-                    <a:pt x="3647643" y="2916977"/>
-                  </a:lnTo>
-                  <a:lnTo>
-                    <a:pt x="3719266" y="2936829"/>
-                  </a:lnTo>
-                  <a:lnTo>
-                    <a:pt x="3790888" y="2955986"/>
-                  </a:lnTo>
-                  <a:lnTo>
-                    <a:pt x="3862511" y="2974472"/>
-                  </a:lnTo>
-                  <a:lnTo>
-                    <a:pt x="3934133" y="2992310"/>
-                  </a:lnTo>
-                  <a:lnTo>
-                    <a:pt x="4005756" y="3009524"/>
-                  </a:lnTo>
-                  <a:lnTo>
-                    <a:pt x="4077378" y="3026134"/>
-                  </a:lnTo>
-                  <a:lnTo>
-                    <a:pt x="4149001" y="3042163"/>
-                  </a:lnTo>
-                  <a:lnTo>
-                    <a:pt x="4220623" y="3057631"/>
-                  </a:lnTo>
-                  <a:lnTo>
-                    <a:pt x="4292246" y="3072556"/>
-                  </a:lnTo>
-                  <a:lnTo>
-                    <a:pt x="4363868" y="3086959"/>
-                  </a:lnTo>
-                  <a:lnTo>
-                    <a:pt x="4435491" y="3100857"/>
-                  </a:lnTo>
-                  <a:lnTo>
-                    <a:pt x="4507113" y="3114269"/>
-                  </a:lnTo>
-                  <a:lnTo>
-                    <a:pt x="4578736" y="3127210"/>
-                  </a:lnTo>
-                  <a:lnTo>
-                    <a:pt x="4650358" y="3139699"/>
-                  </a:lnTo>
-                  <a:lnTo>
-                    <a:pt x="4721981" y="3151750"/>
-                  </a:lnTo>
-                  <a:lnTo>
-                    <a:pt x="4793603" y="3163378"/>
-                  </a:lnTo>
-                  <a:lnTo>
-                    <a:pt x="4865226" y="3174600"/>
-                  </a:lnTo>
-                  <a:lnTo>
-                    <a:pt x="4936849" y="3185428"/>
-                  </a:lnTo>
-                  <a:lnTo>
-                    <a:pt x="5008471" y="3195878"/>
-                  </a:lnTo>
-                  <a:lnTo>
-                    <a:pt x="5080094" y="3205961"/>
-                  </a:lnTo>
-                  <a:lnTo>
-                    <a:pt x="5151716" y="3215691"/>
-                  </a:lnTo>
-                  <a:lnTo>
-                    <a:pt x="5223339" y="3225080"/>
-                  </a:lnTo>
-                  <a:lnTo>
-                    <a:pt x="5294961" y="3234140"/>
-                  </a:lnTo>
-                  <a:lnTo>
-                    <a:pt x="5366584" y="3242883"/>
-                  </a:lnTo>
-                  <a:lnTo>
-                    <a:pt x="5438206" y="3251320"/>
-                  </a:lnTo>
-                  <a:lnTo>
-                    <a:pt x="5509829" y="3259461"/>
-                  </a:lnTo>
-                  <a:lnTo>
-                    <a:pt x="5581451" y="3267317"/>
-                  </a:lnTo>
-                  <a:lnTo>
-                    <a:pt x="5653074" y="3274898"/>
-                  </a:lnTo>
-                  <a:lnTo>
-                    <a:pt x="5724696" y="3282213"/>
-                  </a:lnTo>
-                  <a:lnTo>
-                    <a:pt x="5796319" y="3289272"/>
-                  </a:lnTo>
-                  <a:lnTo>
-                    <a:pt x="5867941" y="3296084"/>
-                  </a:lnTo>
-                  <a:lnTo>
-                    <a:pt x="5939564" y="3302657"/>
-                  </a:lnTo>
-                  <a:lnTo>
-                    <a:pt x="6011186" y="3309000"/>
-                  </a:lnTo>
-                  <a:lnTo>
-                    <a:pt x="6082809" y="3315121"/>
-                  </a:lnTo>
-                  <a:lnTo>
-                    <a:pt x="6154431" y="3321028"/>
-                  </a:lnTo>
-                  <a:lnTo>
-                    <a:pt x="6226054" y="3326727"/>
-                  </a:lnTo>
-                  <a:lnTo>
-                    <a:pt x="6297677" y="3332227"/>
-                  </a:lnTo>
-                  <a:lnTo>
-                    <a:pt x="6369299" y="3337534"/>
-                  </a:lnTo>
-                  <a:lnTo>
-                    <a:pt x="6440922" y="3342656"/>
-                  </a:lnTo>
-                  <a:lnTo>
-                    <a:pt x="6512544" y="3347598"/>
+                    <a:pt x="11540" y="20029"/>
+                  </a:lnTo>
+                  <a:lnTo>
+                    <a:pt x="83163" y="140025"/>
+                  </a:lnTo>
+                  <a:lnTo>
+                    <a:pt x="154785" y="255864"/>
+                  </a:lnTo>
+                  <a:lnTo>
+                    <a:pt x="226408" y="367690"/>
+                  </a:lnTo>
+                  <a:lnTo>
+                    <a:pt x="298031" y="475642"/>
+                  </a:lnTo>
+                  <a:lnTo>
+                    <a:pt x="369653" y="579854"/>
+                  </a:lnTo>
+                  <a:lnTo>
+                    <a:pt x="441276" y="680455"/>
+                  </a:lnTo>
+                  <a:lnTo>
+                    <a:pt x="512898" y="777572"/>
+                  </a:lnTo>
+                  <a:lnTo>
+                    <a:pt x="584521" y="871324"/>
+                  </a:lnTo>
+                  <a:lnTo>
+                    <a:pt x="656143" y="961828"/>
+                  </a:lnTo>
+                  <a:lnTo>
+                    <a:pt x="727766" y="1049196"/>
+                  </a:lnTo>
+                  <a:lnTo>
+                    <a:pt x="799388" y="1133538"/>
+                  </a:lnTo>
+                  <a:lnTo>
+                    <a:pt x="871011" y="1214958"/>
+                  </a:lnTo>
+                  <a:lnTo>
+                    <a:pt x="942633" y="1293557"/>
+                  </a:lnTo>
+                  <a:lnTo>
+                    <a:pt x="1014256" y="1369434"/>
+                  </a:lnTo>
+                  <a:lnTo>
+                    <a:pt x="1085878" y="1442681"/>
+                  </a:lnTo>
+                  <a:lnTo>
+                    <a:pt x="1157501" y="1513391"/>
+                  </a:lnTo>
+                  <a:lnTo>
+                    <a:pt x="1229123" y="1581652"/>
+                  </a:lnTo>
+                  <a:lnTo>
+                    <a:pt x="1300746" y="1647547"/>
+                  </a:lnTo>
+                  <a:lnTo>
+                    <a:pt x="1372368" y="1711160"/>
+                  </a:lnTo>
+                  <a:lnTo>
+                    <a:pt x="1443991" y="1772569"/>
+                  </a:lnTo>
+                  <a:lnTo>
+                    <a:pt x="1515613" y="1831851"/>
+                  </a:lnTo>
+                  <a:lnTo>
+                    <a:pt x="1587236" y="1889078"/>
+                  </a:lnTo>
+                  <a:lnTo>
+                    <a:pt x="1658859" y="1944324"/>
+                  </a:lnTo>
+                  <a:lnTo>
+                    <a:pt x="1730481" y="1997655"/>
+                  </a:lnTo>
+                  <a:lnTo>
+                    <a:pt x="1802104" y="2049139"/>
+                  </a:lnTo>
+                  <a:lnTo>
+                    <a:pt x="1873726" y="2098839"/>
+                  </a:lnTo>
+                  <a:lnTo>
+                    <a:pt x="1945349" y="2146817"/>
+                  </a:lnTo>
+                  <a:lnTo>
+                    <a:pt x="2016971" y="2193133"/>
+                  </a:lnTo>
+                  <a:lnTo>
+                    <a:pt x="2088594" y="2237845"/>
+                  </a:lnTo>
+                  <a:lnTo>
+                    <a:pt x="2160216" y="2281008"/>
+                  </a:lnTo>
+                  <a:lnTo>
+                    <a:pt x="2231839" y="2322675"/>
+                  </a:lnTo>
+                  <a:lnTo>
+                    <a:pt x="2303461" y="2362899"/>
+                  </a:lnTo>
+                  <a:lnTo>
+                    <a:pt x="2375084" y="2401729"/>
+                  </a:lnTo>
+                  <a:lnTo>
+                    <a:pt x="2446706" y="2439214"/>
+                  </a:lnTo>
+                  <a:lnTo>
+                    <a:pt x="2518329" y="2475401"/>
+                  </a:lnTo>
+                  <a:lnTo>
+                    <a:pt x="2589951" y="2510334"/>
+                  </a:lnTo>
+                  <a:lnTo>
+                    <a:pt x="2661574" y="2544056"/>
+                  </a:lnTo>
+                  <a:lnTo>
+                    <a:pt x="2733196" y="2576611"/>
+                  </a:lnTo>
+                  <a:lnTo>
+                    <a:pt x="2804819" y="2608037"/>
+                  </a:lnTo>
+                  <a:lnTo>
+                    <a:pt x="2876441" y="2638375"/>
+                  </a:lnTo>
+                  <a:lnTo>
+                    <a:pt x="2948064" y="2667662"/>
+                  </a:lnTo>
+                  <a:lnTo>
+                    <a:pt x="3019687" y="2695934"/>
+                  </a:lnTo>
+                  <a:lnTo>
+                    <a:pt x="3091309" y="2723227"/>
+                  </a:lnTo>
+                  <a:lnTo>
+                    <a:pt x="3162932" y="2749574"/>
+                  </a:lnTo>
+                  <a:lnTo>
+                    <a:pt x="3234554" y="2775008"/>
+                  </a:lnTo>
+                  <a:lnTo>
+                    <a:pt x="3306177" y="2799562"/>
+                  </a:lnTo>
+                  <a:lnTo>
+                    <a:pt x="3377799" y="2823264"/>
+                  </a:lnTo>
+                  <a:lnTo>
+                    <a:pt x="3449422" y="2846146"/>
+                  </a:lnTo>
+                  <a:lnTo>
+                    <a:pt x="3521044" y="2868235"/>
+                  </a:lnTo>
+                  <a:lnTo>
+                    <a:pt x="3592667" y="2889558"/>
+                  </a:lnTo>
+                  <a:lnTo>
+                    <a:pt x="3664289" y="2910143"/>
+                  </a:lnTo>
+                  <a:lnTo>
+                    <a:pt x="3735912" y="2930015"/>
+                  </a:lnTo>
+                  <a:lnTo>
+                    <a:pt x="3807534" y="2949198"/>
+                  </a:lnTo>
+                  <a:lnTo>
+                    <a:pt x="3879157" y="2967717"/>
+                  </a:lnTo>
+                  <a:lnTo>
+                    <a:pt x="3950779" y="2985594"/>
+                  </a:lnTo>
+                  <a:lnTo>
+                    <a:pt x="4022402" y="3002852"/>
+                  </a:lnTo>
+                  <a:lnTo>
+                    <a:pt x="4094024" y="3019512"/>
+                  </a:lnTo>
+                  <a:lnTo>
+                    <a:pt x="4165647" y="3035595"/>
+                  </a:lnTo>
+                  <a:lnTo>
+                    <a:pt x="4237269" y="3051120"/>
+                  </a:lnTo>
+                  <a:lnTo>
+                    <a:pt x="4308892" y="3066108"/>
+                  </a:lnTo>
+                  <a:lnTo>
+                    <a:pt x="4380515" y="3080577"/>
+                  </a:lnTo>
+                  <a:lnTo>
+                    <a:pt x="4452137" y="3094544"/>
+                  </a:lnTo>
+                  <a:lnTo>
+                    <a:pt x="4523760" y="3108027"/>
+                  </a:lnTo>
+                  <a:lnTo>
+                    <a:pt x="4595382" y="3121044"/>
+                  </a:lnTo>
+                  <a:lnTo>
+                    <a:pt x="4667005" y="3133609"/>
+                  </a:lnTo>
+                  <a:lnTo>
+                    <a:pt x="4738627" y="3145739"/>
+                  </a:lnTo>
+                  <a:lnTo>
+                    <a:pt x="4810250" y="3157449"/>
+                  </a:lnTo>
+                  <a:lnTo>
+                    <a:pt x="4881872" y="3168753"/>
+                  </a:lnTo>
+                  <a:lnTo>
+                    <a:pt x="4953495" y="3179666"/>
+                  </a:lnTo>
+                  <a:lnTo>
+                    <a:pt x="5025117" y="3190200"/>
+                  </a:lnTo>
+                  <a:lnTo>
+                    <a:pt x="5096740" y="3200370"/>
+                  </a:lnTo>
+                  <a:lnTo>
+                    <a:pt x="5168362" y="3210187"/>
+                  </a:lnTo>
+                  <a:lnTo>
+                    <a:pt x="5239985" y="3219664"/>
+                  </a:lnTo>
+                  <a:lnTo>
+                    <a:pt x="5311607" y="3228813"/>
+                  </a:lnTo>
+                  <a:lnTo>
+                    <a:pt x="5383230" y="3237645"/>
+                  </a:lnTo>
+                  <a:lnTo>
+                    <a:pt x="5454852" y="3246171"/>
+                  </a:lnTo>
+                  <a:lnTo>
+                    <a:pt x="5526475" y="3254401"/>
+                  </a:lnTo>
+                  <a:lnTo>
+                    <a:pt x="5598097" y="3262346"/>
+                  </a:lnTo>
+                  <a:lnTo>
+                    <a:pt x="5669720" y="3270017"/>
+                  </a:lnTo>
+                  <a:lnTo>
+                    <a:pt x="5741343" y="3277421"/>
+                  </a:lnTo>
+                  <a:lnTo>
+                    <a:pt x="5812965" y="3284569"/>
+                  </a:lnTo>
+                  <a:lnTo>
+                    <a:pt x="5884588" y="3291469"/>
+                  </a:lnTo>
+                  <a:lnTo>
+                    <a:pt x="5956210" y="3298130"/>
+                  </a:lnTo>
+                  <a:lnTo>
+                    <a:pt x="6027833" y="3304561"/>
+                  </a:lnTo>
+                  <a:lnTo>
+                    <a:pt x="6099455" y="3310768"/>
+                  </a:lnTo>
+                  <a:lnTo>
+                    <a:pt x="6171078" y="3316761"/>
+                  </a:lnTo>
+                  <a:lnTo>
+                    <a:pt x="6242700" y="3322546"/>
+                  </a:lnTo>
+                  <a:lnTo>
+                    <a:pt x="6314323" y="3328131"/>
+                  </a:lnTo>
+                  <a:lnTo>
+                    <a:pt x="6385945" y="3333522"/>
+                  </a:lnTo>
+                  <a:lnTo>
+                    <a:pt x="6457568" y="3338726"/>
+                  </a:lnTo>
+                  <a:lnTo>
+                    <a:pt x="6529190" y="3343750"/>
                   </a:lnTo>
                 </a:path>
               </a:pathLst>
@@ -4873,7 +4876,7 @@
           </p:nvSpPr>
           <p:spPr>
             <a:xfrm>
-              <a:off x="4632789" y="2073503"/>
+              <a:off x="4648520" y="2073503"/>
               <a:ext cx="0" cy="3649639"/>
             </a:xfrm>
             <a:custGeom>
@@ -4916,7 +4919,7 @@
           </p:nvSpPr>
           <p:spPr>
             <a:xfrm>
-              <a:off x="3519238" y="2073503"/>
+              <a:off x="3510041" y="2073503"/>
               <a:ext cx="0" cy="3649639"/>
             </a:xfrm>
             <a:custGeom>
@@ -4959,7 +4962,7 @@
           </p:nvSpPr>
           <p:spPr>
             <a:xfrm>
-              <a:off x="5667105" y="2073503"/>
+              <a:off x="5671562" y="2073503"/>
               <a:ext cx="0" cy="3649639"/>
             </a:xfrm>
             <a:custGeom>
@@ -5232,7 +5235,7 @@
           </p:nvSpPr>
           <p:spPr>
             <a:xfrm>
-              <a:off x="787919" y="5785772"/>
+              <a:off x="789147" y="5785772"/>
               <a:ext cx="161574" cy="80101"/>
             </a:xfrm>
             <a:prstGeom prst="rect">
@@ -5278,7 +5281,7 @@
           </p:nvSpPr>
           <p:spPr>
             <a:xfrm>
-              <a:off x="1701509" y="5785772"/>
+              <a:off x="1701133" y="5785772"/>
               <a:ext cx="161574" cy="80101"/>
             </a:xfrm>
             <a:prstGeom prst="rect">
@@ -5324,7 +5327,7 @@
           </p:nvSpPr>
           <p:spPr>
             <a:xfrm>
-              <a:off x="2615100" y="5785772"/>
+              <a:off x="2613120" y="5785772"/>
               <a:ext cx="161574" cy="80101"/>
             </a:xfrm>
             <a:prstGeom prst="rect">
@@ -5370,7 +5373,7 @@
           </p:nvSpPr>
           <p:spPr>
             <a:xfrm>
-              <a:off x="3528691" y="5785772"/>
+              <a:off x="3525106" y="5785772"/>
               <a:ext cx="161574" cy="80101"/>
             </a:xfrm>
             <a:prstGeom prst="rect">
@@ -5416,7 +5419,7 @@
           </p:nvSpPr>
           <p:spPr>
             <a:xfrm>
-              <a:off x="4442282" y="5785772"/>
+              <a:off x="4437092" y="5785772"/>
               <a:ext cx="161574" cy="80101"/>
             </a:xfrm>
             <a:prstGeom prst="rect">
@@ -5462,7 +5465,7 @@
           </p:nvSpPr>
           <p:spPr>
             <a:xfrm>
-              <a:off x="5405571" y="5785772"/>
+              <a:off x="5398776" y="5785772"/>
               <a:ext cx="62179" cy="80101"/>
             </a:xfrm>
             <a:prstGeom prst="rect">
@@ -5508,7 +5511,7 @@
           </p:nvSpPr>
           <p:spPr>
             <a:xfrm>
-              <a:off x="6288072" y="5785772"/>
+              <a:off x="6279673" y="5785772"/>
               <a:ext cx="124358" cy="80101"/>
             </a:xfrm>
             <a:prstGeom prst="rect">
@@ -5554,7 +5557,7 @@
           </p:nvSpPr>
           <p:spPr>
             <a:xfrm>
-              <a:off x="7201663" y="5785772"/>
+              <a:off x="7191659" y="5785772"/>
               <a:ext cx="124358" cy="80101"/>
             </a:xfrm>
             <a:prstGeom prst="rect">
@@ -5600,7 +5603,7 @@
           </p:nvSpPr>
           <p:spPr>
             <a:xfrm>
-              <a:off x="8115254" y="5785772"/>
+              <a:off x="8103645" y="5785772"/>
               <a:ext cx="124358" cy="80101"/>
             </a:xfrm>
             <a:prstGeom prst="rect">
@@ -5771,7 +5774,7 @@
                   <a:latin typeface="Helvetica"/>
                   <a:cs typeface="Helvetica"/>
                 </a:rPr>
-                <a:t>subHR per 10 % decline: 1.58 (1.12-2.21), p_Bonf = 0.051 (n = 6)  |  per IQR decline (Δ = 23.5 %): 2.91 (1.31-6.46)  |  IQR: [-21.0, 2.5] %</a:t>
+                <a:t>subHR per 10 % decline: 1.57 (1.12-2.20), p_Bonf = 0.058 (n = 6)  |  per IQR decline (Δ = 23.7 %): 2.90 (1.29-6.49)  |  IQR: [-21.1, 2.7] %</a:t>
               </a:r>
             </a:p>
           </p:txBody>
